--- a/figures/device_stacks_front.pptx
+++ b/figures/device_stacks_front.pptx
@@ -3090,7 +3090,141 @@
       <p:grpSpPr/>
       <p:sp>
         <p:nvSpPr>
-          <p:cNvPr id="2" name="Ag reflector + MLA film / Glass + Microlens array film front"/>
+          <p:cNvPr id="2" name="Ag reflector + MLA film / Glass + Microlens array film left"/>
+          <p:cNvSpPr/>
+          <p:nvPr/>
+        </p:nvSpPr>
+        <p:spPr>
+          <a:xfrm>
+            <a:off x="1197399" y="4367870"/>
+            <a:ext cx="195938" cy="574751"/>
+          </a:xfrm>
+          <a:custGeom>
+            <a:avLst/>
+            <a:gdLst/>
+            <a:ahLst/>
+            <a:cxnLst/>
+            <a:rect l="l" t="t" r="r" b="b"/>
+            <a:pathLst>
+              <a:path w="195938" h="574751">
+                <a:moveTo>
+                  <a:pt x="195938" y="574751"/>
+                </a:moveTo>
+                <a:lnTo>
+                  <a:pt x="0" y="400584"/>
+                </a:lnTo>
+                <a:lnTo>
+                  <a:pt x="0" y="0"/>
+                </a:lnTo>
+                <a:lnTo>
+                  <a:pt x="195938" y="174167"/>
+                </a:lnTo>
+                <a:close/>
+              </a:path>
+            </a:pathLst>
+          </a:custGeom>
+          <a:solidFill>
+            <a:srgbClr val="AEC0CE"/>
+          </a:solidFill>
+          <a:ln w="9525">
+            <a:solidFill>
+              <a:srgbClr val="5D666F"/>
+            </a:solidFill>
+          </a:ln>
+          <a:effectLst/>
+        </p:spPr>
+        <p:style>
+          <a:lnRef idx="1">
+            <a:schemeClr val="accent1"/>
+          </a:lnRef>
+          <a:fillRef idx="3">
+            <a:schemeClr val="accent1"/>
+          </a:fillRef>
+          <a:effectRef idx="2">
+            <a:schemeClr val="accent1"/>
+          </a:effectRef>
+          <a:fontRef idx="minor">
+            <a:schemeClr val="lt1"/>
+          </a:fontRef>
+        </p:style>
+        <p:txBody>
+          <a:bodyPr rtlCol="0" anchor="ctr"/>
+          <a:lstStyle/>
+          <a:p>
+            <a:pPr algn="ctr"/>
+          </a:p>
+        </p:txBody>
+      </p:sp>
+      <p:sp>
+        <p:nvSpPr>
+          <p:cNvPr id="3" name="Ag reflector + MLA film / Glass + Microlens array film right"/>
+          <p:cNvSpPr/>
+          <p:nvPr/>
+        </p:nvSpPr>
+        <p:spPr>
+          <a:xfrm>
+            <a:off x="4005843" y="4367870"/>
+            <a:ext cx="195938" cy="574751"/>
+          </a:xfrm>
+          <a:custGeom>
+            <a:avLst/>
+            <a:gdLst/>
+            <a:ahLst/>
+            <a:cxnLst/>
+            <a:rect l="l" t="t" r="r" b="b"/>
+            <a:pathLst>
+              <a:path w="195938" h="574751">
+                <a:moveTo>
+                  <a:pt x="0" y="574751"/>
+                </a:moveTo>
+                <a:lnTo>
+                  <a:pt x="195938" y="400584"/>
+                </a:lnTo>
+                <a:lnTo>
+                  <a:pt x="195938" y="0"/>
+                </a:lnTo>
+                <a:lnTo>
+                  <a:pt x="0" y="174167"/>
+                </a:lnTo>
+                <a:close/>
+              </a:path>
+            </a:pathLst>
+          </a:custGeom>
+          <a:solidFill>
+            <a:srgbClr val="AEC0CE"/>
+          </a:solidFill>
+          <a:ln w="9525">
+            <a:solidFill>
+              <a:srgbClr val="5D666F"/>
+            </a:solidFill>
+          </a:ln>
+          <a:effectLst/>
+        </p:spPr>
+        <p:style>
+          <a:lnRef idx="1">
+            <a:schemeClr val="accent1"/>
+          </a:lnRef>
+          <a:fillRef idx="3">
+            <a:schemeClr val="accent1"/>
+          </a:fillRef>
+          <a:effectRef idx="2">
+            <a:schemeClr val="accent1"/>
+          </a:effectRef>
+          <a:fontRef idx="minor">
+            <a:schemeClr val="lt1"/>
+          </a:fontRef>
+        </p:style>
+        <p:txBody>
+          <a:bodyPr rtlCol="0" anchor="ctr"/>
+          <a:lstStyle/>
+          <a:p>
+            <a:pPr algn="ctr"/>
+          </a:p>
+        </p:txBody>
+      </p:sp>
+      <p:sp>
+        <p:nvSpPr>
+          <p:cNvPr id="4" name="Ag reflector + MLA film / Glass + Microlens array film front"/>
           <p:cNvSpPr/>
           <p:nvPr/>
         </p:nvSpPr>
@@ -3631,74 +3765,7 @@
       </p:sp>
       <p:sp>
         <p:nvSpPr>
-          <p:cNvPr id="3" name="Ag reflector + MLA film / Glass + Microlens array film side"/>
-          <p:cNvSpPr/>
-          <p:nvPr/>
-        </p:nvSpPr>
-        <p:spPr>
-          <a:xfrm>
-            <a:off x="4005843" y="4367870"/>
-            <a:ext cx="278667" cy="574751"/>
-          </a:xfrm>
-          <a:custGeom>
-            <a:avLst/>
-            <a:gdLst/>
-            <a:ahLst/>
-            <a:cxnLst/>
-            <a:rect l="l" t="t" r="r" b="b"/>
-            <a:pathLst>
-              <a:path w="278667" h="574751">
-                <a:moveTo>
-                  <a:pt x="0" y="574751"/>
-                </a:moveTo>
-                <a:lnTo>
-                  <a:pt x="278667" y="400584"/>
-                </a:lnTo>
-                <a:lnTo>
-                  <a:pt x="278667" y="0"/>
-                </a:lnTo>
-                <a:lnTo>
-                  <a:pt x="0" y="174167"/>
-                </a:lnTo>
-                <a:close/>
-              </a:path>
-            </a:pathLst>
-          </a:custGeom>
-          <a:solidFill>
-            <a:srgbClr val="A1B2BF"/>
-          </a:solidFill>
-          <a:ln w="9525">
-            <a:solidFill>
-              <a:srgbClr val="5D666F"/>
-            </a:solidFill>
-          </a:ln>
-          <a:effectLst/>
-        </p:spPr>
-        <p:style>
-          <a:lnRef idx="1">
-            <a:schemeClr val="accent1"/>
-          </a:lnRef>
-          <a:fillRef idx="3">
-            <a:schemeClr val="accent1"/>
-          </a:fillRef>
-          <a:effectRef idx="2">
-            <a:schemeClr val="accent1"/>
-          </a:effectRef>
-          <a:fontRef idx="minor">
-            <a:schemeClr val="lt1"/>
-          </a:fontRef>
-        </p:style>
-        <p:txBody>
-          <a:bodyPr rtlCol="0" anchor="ctr"/>
-          <a:lstStyle/>
-          <a:p>
-            <a:pPr algn="ctr"/>
-          </a:p>
-        </p:txBody>
-      </p:sp>
-      <p:sp>
-        <p:nvSpPr>
-          <p:cNvPr id="4" name="Ag reflector + MLA film / Glass + Microlens array film label"/>
+          <p:cNvPr id="5" name="Ag reflector + MLA film / Glass + Microlens array film label"/>
           <p:cNvSpPr txBox="1"/>
           <p:nvPr/>
         </p:nvSpPr>
@@ -3733,7 +3800,141 @@
       </p:sp>
       <p:sp>
         <p:nvSpPr>
-          <p:cNvPr id="5" name="Ag reflector + MLA film / ITO [150] front"/>
+          <p:cNvPr id="6" name="Ag reflector + MLA film / ITO [150] left"/>
+          <p:cNvSpPr/>
+          <p:nvPr/>
+        </p:nvSpPr>
+        <p:spPr>
+          <a:xfrm>
+            <a:off x="1197399" y="4080494"/>
+            <a:ext cx="195938" cy="461543"/>
+          </a:xfrm>
+          <a:custGeom>
+            <a:avLst/>
+            <a:gdLst/>
+            <a:ahLst/>
+            <a:cxnLst/>
+            <a:rect l="l" t="t" r="r" b="b"/>
+            <a:pathLst>
+              <a:path w="195938" h="461543">
+                <a:moveTo>
+                  <a:pt x="195938" y="461543"/>
+                </a:moveTo>
+                <a:lnTo>
+                  <a:pt x="0" y="287376"/>
+                </a:lnTo>
+                <a:lnTo>
+                  <a:pt x="0" y="0"/>
+                </a:lnTo>
+                <a:lnTo>
+                  <a:pt x="195938" y="174167"/>
+                </a:lnTo>
+                <a:close/>
+              </a:path>
+            </a:pathLst>
+          </a:custGeom>
+          <a:solidFill>
+            <a:srgbClr val="6BB1C3"/>
+          </a:solidFill>
+          <a:ln w="9525">
+            <a:solidFill>
+              <a:srgbClr val="5D666F"/>
+            </a:solidFill>
+          </a:ln>
+          <a:effectLst/>
+        </p:spPr>
+        <p:style>
+          <a:lnRef idx="1">
+            <a:schemeClr val="accent1"/>
+          </a:lnRef>
+          <a:fillRef idx="3">
+            <a:schemeClr val="accent1"/>
+          </a:fillRef>
+          <a:effectRef idx="2">
+            <a:schemeClr val="accent1"/>
+          </a:effectRef>
+          <a:fontRef idx="minor">
+            <a:schemeClr val="lt1"/>
+          </a:fontRef>
+        </p:style>
+        <p:txBody>
+          <a:bodyPr rtlCol="0" anchor="ctr"/>
+          <a:lstStyle/>
+          <a:p>
+            <a:pPr algn="ctr"/>
+          </a:p>
+        </p:txBody>
+      </p:sp>
+      <p:sp>
+        <p:nvSpPr>
+          <p:cNvPr id="7" name="Ag reflector + MLA film / ITO [150] right"/>
+          <p:cNvSpPr/>
+          <p:nvPr/>
+        </p:nvSpPr>
+        <p:spPr>
+          <a:xfrm>
+            <a:off x="4005843" y="4080494"/>
+            <a:ext cx="195938" cy="461543"/>
+          </a:xfrm>
+          <a:custGeom>
+            <a:avLst/>
+            <a:gdLst/>
+            <a:ahLst/>
+            <a:cxnLst/>
+            <a:rect l="l" t="t" r="r" b="b"/>
+            <a:pathLst>
+              <a:path w="195938" h="461543">
+                <a:moveTo>
+                  <a:pt x="0" y="461543"/>
+                </a:moveTo>
+                <a:lnTo>
+                  <a:pt x="195938" y="287376"/>
+                </a:lnTo>
+                <a:lnTo>
+                  <a:pt x="195938" y="0"/>
+                </a:lnTo>
+                <a:lnTo>
+                  <a:pt x="0" y="174167"/>
+                </a:lnTo>
+                <a:close/>
+              </a:path>
+            </a:pathLst>
+          </a:custGeom>
+          <a:solidFill>
+            <a:srgbClr val="6BB1C3"/>
+          </a:solidFill>
+          <a:ln w="9525">
+            <a:solidFill>
+              <a:srgbClr val="5D666F"/>
+            </a:solidFill>
+          </a:ln>
+          <a:effectLst/>
+        </p:spPr>
+        <p:style>
+          <a:lnRef idx="1">
+            <a:schemeClr val="accent1"/>
+          </a:lnRef>
+          <a:fillRef idx="3">
+            <a:schemeClr val="accent1"/>
+          </a:fillRef>
+          <a:effectRef idx="2">
+            <a:schemeClr val="accent1"/>
+          </a:effectRef>
+          <a:fontRef idx="minor">
+            <a:schemeClr val="lt1"/>
+          </a:fontRef>
+        </p:style>
+        <p:txBody>
+          <a:bodyPr rtlCol="0" anchor="ctr"/>
+          <a:lstStyle/>
+          <a:p>
+            <a:pPr algn="ctr"/>
+          </a:p>
+        </p:txBody>
+      </p:sp>
+      <p:sp>
+        <p:nvSpPr>
+          <p:cNvPr id="8" name="Ag reflector + MLA film / ITO [150] front"/>
           <p:cNvSpPr/>
           <p:nvPr/>
         </p:nvSpPr>
@@ -3800,74 +4001,7 @@
       </p:sp>
       <p:sp>
         <p:nvSpPr>
-          <p:cNvPr id="6" name="Ag reflector + MLA film / ITO [150] side"/>
-          <p:cNvSpPr/>
-          <p:nvPr/>
-        </p:nvSpPr>
-        <p:spPr>
-          <a:xfrm>
-            <a:off x="4005843" y="4080494"/>
-            <a:ext cx="278667" cy="461543"/>
-          </a:xfrm>
-          <a:custGeom>
-            <a:avLst/>
-            <a:gdLst/>
-            <a:ahLst/>
-            <a:cxnLst/>
-            <a:rect l="l" t="t" r="r" b="b"/>
-            <a:pathLst>
-              <a:path w="278667" h="461543">
-                <a:moveTo>
-                  <a:pt x="0" y="461543"/>
-                </a:moveTo>
-                <a:lnTo>
-                  <a:pt x="278667" y="287376"/>
-                </a:lnTo>
-                <a:lnTo>
-                  <a:pt x="278667" y="0"/>
-                </a:lnTo>
-                <a:lnTo>
-                  <a:pt x="0" y="174167"/>
-                </a:lnTo>
-                <a:close/>
-              </a:path>
-            </a:pathLst>
-          </a:custGeom>
-          <a:solidFill>
-            <a:srgbClr val="63A5B5"/>
-          </a:solidFill>
-          <a:ln w="9525">
-            <a:solidFill>
-              <a:srgbClr val="5D666F"/>
-            </a:solidFill>
-          </a:ln>
-          <a:effectLst/>
-        </p:spPr>
-        <p:style>
-          <a:lnRef idx="1">
-            <a:schemeClr val="accent1"/>
-          </a:lnRef>
-          <a:fillRef idx="3">
-            <a:schemeClr val="accent1"/>
-          </a:fillRef>
-          <a:effectRef idx="2">
-            <a:schemeClr val="accent1"/>
-          </a:effectRef>
-          <a:fontRef idx="minor">
-            <a:schemeClr val="lt1"/>
-          </a:fontRef>
-        </p:style>
-        <p:txBody>
-          <a:bodyPr rtlCol="0" anchor="ctr"/>
-          <a:lstStyle/>
-          <a:p>
-            <a:pPr algn="ctr"/>
-          </a:p>
-        </p:txBody>
-      </p:sp>
-      <p:sp>
-        <p:nvSpPr>
-          <p:cNvPr id="7" name="Ag reflector + MLA film / ITO [150] label"/>
+          <p:cNvPr id="9" name="Ag reflector + MLA film / ITO [150] label"/>
           <p:cNvSpPr txBox="1"/>
           <p:nvPr/>
         </p:nvSpPr>
@@ -3902,7 +4036,141 @@
       </p:sp>
       <p:sp>
         <p:nvSpPr>
-          <p:cNvPr id="8" name="Ag reflector + MLA film / HATCN/TAPC [5/55] 3 pairs front"/>
+          <p:cNvPr id="10" name="Ag reflector + MLA film / HATCN/TAPC [5/55] 3 pairs left"/>
+          <p:cNvSpPr/>
+          <p:nvPr/>
+        </p:nvSpPr>
+        <p:spPr>
+          <a:xfrm>
+            <a:off x="1197399" y="3793119"/>
+            <a:ext cx="195938" cy="461542"/>
+          </a:xfrm>
+          <a:custGeom>
+            <a:avLst/>
+            <a:gdLst/>
+            <a:ahLst/>
+            <a:cxnLst/>
+            <a:rect l="l" t="t" r="r" b="b"/>
+            <a:pathLst>
+              <a:path w="195938" h="461542">
+                <a:moveTo>
+                  <a:pt x="195938" y="461542"/>
+                </a:moveTo>
+                <a:lnTo>
+                  <a:pt x="0" y="287375"/>
+                </a:lnTo>
+                <a:lnTo>
+                  <a:pt x="0" y="0"/>
+                </a:lnTo>
+                <a:lnTo>
+                  <a:pt x="195938" y="174167"/>
+                </a:lnTo>
+                <a:close/>
+              </a:path>
+            </a:pathLst>
+          </a:custGeom>
+          <a:solidFill>
+            <a:srgbClr val="CFBB92"/>
+          </a:solidFill>
+          <a:ln w="9525">
+            <a:solidFill>
+              <a:srgbClr val="5D666F"/>
+            </a:solidFill>
+          </a:ln>
+          <a:effectLst/>
+        </p:spPr>
+        <p:style>
+          <a:lnRef idx="1">
+            <a:schemeClr val="accent1"/>
+          </a:lnRef>
+          <a:fillRef idx="3">
+            <a:schemeClr val="accent1"/>
+          </a:fillRef>
+          <a:effectRef idx="2">
+            <a:schemeClr val="accent1"/>
+          </a:effectRef>
+          <a:fontRef idx="minor">
+            <a:schemeClr val="lt1"/>
+          </a:fontRef>
+        </p:style>
+        <p:txBody>
+          <a:bodyPr rtlCol="0" anchor="ctr"/>
+          <a:lstStyle/>
+          <a:p>
+            <a:pPr algn="ctr"/>
+          </a:p>
+        </p:txBody>
+      </p:sp>
+      <p:sp>
+        <p:nvSpPr>
+          <p:cNvPr id="11" name="Ag reflector + MLA film / HATCN/TAPC [5/55] 3 pairs right"/>
+          <p:cNvSpPr/>
+          <p:nvPr/>
+        </p:nvSpPr>
+        <p:spPr>
+          <a:xfrm>
+            <a:off x="4005843" y="3793119"/>
+            <a:ext cx="195938" cy="461542"/>
+          </a:xfrm>
+          <a:custGeom>
+            <a:avLst/>
+            <a:gdLst/>
+            <a:ahLst/>
+            <a:cxnLst/>
+            <a:rect l="l" t="t" r="r" b="b"/>
+            <a:pathLst>
+              <a:path w="195938" h="461542">
+                <a:moveTo>
+                  <a:pt x="0" y="461542"/>
+                </a:moveTo>
+                <a:lnTo>
+                  <a:pt x="195938" y="287375"/>
+                </a:lnTo>
+                <a:lnTo>
+                  <a:pt x="195938" y="0"/>
+                </a:lnTo>
+                <a:lnTo>
+                  <a:pt x="0" y="174167"/>
+                </a:lnTo>
+                <a:close/>
+              </a:path>
+            </a:pathLst>
+          </a:custGeom>
+          <a:solidFill>
+            <a:srgbClr val="CFBB92"/>
+          </a:solidFill>
+          <a:ln w="9525">
+            <a:solidFill>
+              <a:srgbClr val="5D666F"/>
+            </a:solidFill>
+          </a:ln>
+          <a:effectLst/>
+        </p:spPr>
+        <p:style>
+          <a:lnRef idx="1">
+            <a:schemeClr val="accent1"/>
+          </a:lnRef>
+          <a:fillRef idx="3">
+            <a:schemeClr val="accent1"/>
+          </a:fillRef>
+          <a:effectRef idx="2">
+            <a:schemeClr val="accent1"/>
+          </a:effectRef>
+          <a:fontRef idx="minor">
+            <a:schemeClr val="lt1"/>
+          </a:fontRef>
+        </p:style>
+        <p:txBody>
+          <a:bodyPr rtlCol="0" anchor="ctr"/>
+          <a:lstStyle/>
+          <a:p>
+            <a:pPr algn="ctr"/>
+          </a:p>
+        </p:txBody>
+      </p:sp>
+      <p:sp>
+        <p:nvSpPr>
+          <p:cNvPr id="12" name="Ag reflector + MLA film / HATCN/TAPC [5/55] 3 pairs front"/>
           <p:cNvSpPr/>
           <p:nvPr/>
         </p:nvSpPr>
@@ -3969,74 +4237,7 @@
       </p:sp>
       <p:sp>
         <p:nvSpPr>
-          <p:cNvPr id="9" name="Ag reflector + MLA film / HATCN/TAPC [5/55] 3 pairs side"/>
-          <p:cNvSpPr/>
-          <p:nvPr/>
-        </p:nvSpPr>
-        <p:spPr>
-          <a:xfrm>
-            <a:off x="4005843" y="3793119"/>
-            <a:ext cx="278667" cy="461542"/>
-          </a:xfrm>
-          <a:custGeom>
-            <a:avLst/>
-            <a:gdLst/>
-            <a:ahLst/>
-            <a:cxnLst/>
-            <a:rect l="l" t="t" r="r" b="b"/>
-            <a:pathLst>
-              <a:path w="278667" h="461542">
-                <a:moveTo>
-                  <a:pt x="0" y="461542"/>
-                </a:moveTo>
-                <a:lnTo>
-                  <a:pt x="278667" y="287375"/>
-                </a:lnTo>
-                <a:lnTo>
-                  <a:pt x="278667" y="0"/>
-                </a:lnTo>
-                <a:lnTo>
-                  <a:pt x="0" y="174167"/>
-                </a:lnTo>
-                <a:close/>
-              </a:path>
-            </a:pathLst>
-          </a:custGeom>
-          <a:solidFill>
-            <a:srgbClr val="C0AE88"/>
-          </a:solidFill>
-          <a:ln w="9525">
-            <a:solidFill>
-              <a:srgbClr val="5D666F"/>
-            </a:solidFill>
-          </a:ln>
-          <a:effectLst/>
-        </p:spPr>
-        <p:style>
-          <a:lnRef idx="1">
-            <a:schemeClr val="accent1"/>
-          </a:lnRef>
-          <a:fillRef idx="3">
-            <a:schemeClr val="accent1"/>
-          </a:fillRef>
-          <a:effectRef idx="2">
-            <a:schemeClr val="accent1"/>
-          </a:effectRef>
-          <a:fontRef idx="minor">
-            <a:schemeClr val="lt1"/>
-          </a:fontRef>
-        </p:style>
-        <p:txBody>
-          <a:bodyPr rtlCol="0" anchor="ctr"/>
-          <a:lstStyle/>
-          <a:p>
-            <a:pPr algn="ctr"/>
-          </a:p>
-        </p:txBody>
-      </p:sp>
-      <p:sp>
-        <p:nvSpPr>
-          <p:cNvPr id="10" name="Ag reflector + MLA film / HATCN/TAPC [5/55] 3 pairs label"/>
+          <p:cNvPr id="13" name="Ag reflector + MLA film / HATCN/TAPC [5/55] 3 pairs label"/>
           <p:cNvSpPr txBox="1"/>
           <p:nvPr/>
         </p:nvSpPr>
@@ -4071,7 +4272,141 @@
       </p:sp>
       <p:sp>
         <p:nvSpPr>
-          <p:cNvPr id="11" name="Ag reflector + MLA film / TCTA [10] front"/>
+          <p:cNvPr id="14" name="Ag reflector + MLA film / TCTA [10] left"/>
+          <p:cNvSpPr/>
+          <p:nvPr/>
+        </p:nvSpPr>
+        <p:spPr>
+          <a:xfrm>
+            <a:off x="1197399" y="3514451"/>
+            <a:ext cx="195938" cy="452835"/>
+          </a:xfrm>
+          <a:custGeom>
+            <a:avLst/>
+            <a:gdLst/>
+            <a:ahLst/>
+            <a:cxnLst/>
+            <a:rect l="l" t="t" r="r" b="b"/>
+            <a:pathLst>
+              <a:path w="195938" h="452835">
+                <a:moveTo>
+                  <a:pt x="195938" y="452835"/>
+                </a:moveTo>
+                <a:lnTo>
+                  <a:pt x="0" y="278668"/>
+                </a:lnTo>
+                <a:lnTo>
+                  <a:pt x="0" y="0"/>
+                </a:lnTo>
+                <a:lnTo>
+                  <a:pt x="195938" y="174167"/>
+                </a:lnTo>
+                <a:close/>
+              </a:path>
+            </a:pathLst>
+          </a:custGeom>
+          <a:solidFill>
+            <a:srgbClr val="CA9B51"/>
+          </a:solidFill>
+          <a:ln w="9525">
+            <a:solidFill>
+              <a:srgbClr val="5D666F"/>
+            </a:solidFill>
+          </a:ln>
+          <a:effectLst/>
+        </p:spPr>
+        <p:style>
+          <a:lnRef idx="1">
+            <a:schemeClr val="accent1"/>
+          </a:lnRef>
+          <a:fillRef idx="3">
+            <a:schemeClr val="accent1"/>
+          </a:fillRef>
+          <a:effectRef idx="2">
+            <a:schemeClr val="accent1"/>
+          </a:effectRef>
+          <a:fontRef idx="minor">
+            <a:schemeClr val="lt1"/>
+          </a:fontRef>
+        </p:style>
+        <p:txBody>
+          <a:bodyPr rtlCol="0" anchor="ctr"/>
+          <a:lstStyle/>
+          <a:p>
+            <a:pPr algn="ctr"/>
+          </a:p>
+        </p:txBody>
+      </p:sp>
+      <p:sp>
+        <p:nvSpPr>
+          <p:cNvPr id="15" name="Ag reflector + MLA film / TCTA [10] right"/>
+          <p:cNvSpPr/>
+          <p:nvPr/>
+        </p:nvSpPr>
+        <p:spPr>
+          <a:xfrm>
+            <a:off x="4005843" y="3514451"/>
+            <a:ext cx="195938" cy="452835"/>
+          </a:xfrm>
+          <a:custGeom>
+            <a:avLst/>
+            <a:gdLst/>
+            <a:ahLst/>
+            <a:cxnLst/>
+            <a:rect l="l" t="t" r="r" b="b"/>
+            <a:pathLst>
+              <a:path w="195938" h="452835">
+                <a:moveTo>
+                  <a:pt x="0" y="452835"/>
+                </a:moveTo>
+                <a:lnTo>
+                  <a:pt x="195938" y="278668"/>
+                </a:lnTo>
+                <a:lnTo>
+                  <a:pt x="195938" y="0"/>
+                </a:lnTo>
+                <a:lnTo>
+                  <a:pt x="0" y="174167"/>
+                </a:lnTo>
+                <a:close/>
+              </a:path>
+            </a:pathLst>
+          </a:custGeom>
+          <a:solidFill>
+            <a:srgbClr val="CA9B51"/>
+          </a:solidFill>
+          <a:ln w="9525">
+            <a:solidFill>
+              <a:srgbClr val="5D666F"/>
+            </a:solidFill>
+          </a:ln>
+          <a:effectLst/>
+        </p:spPr>
+        <p:style>
+          <a:lnRef idx="1">
+            <a:schemeClr val="accent1"/>
+          </a:lnRef>
+          <a:fillRef idx="3">
+            <a:schemeClr val="accent1"/>
+          </a:fillRef>
+          <a:effectRef idx="2">
+            <a:schemeClr val="accent1"/>
+          </a:effectRef>
+          <a:fontRef idx="minor">
+            <a:schemeClr val="lt1"/>
+          </a:fontRef>
+        </p:style>
+        <p:txBody>
+          <a:bodyPr rtlCol="0" anchor="ctr"/>
+          <a:lstStyle/>
+          <a:p>
+            <a:pPr algn="ctr"/>
+          </a:p>
+        </p:txBody>
+      </p:sp>
+      <p:sp>
+        <p:nvSpPr>
+          <p:cNvPr id="16" name="Ag reflector + MLA film / TCTA [10] front"/>
           <p:cNvSpPr/>
           <p:nvPr/>
         </p:nvSpPr>
@@ -4138,74 +4473,7 @@
       </p:sp>
       <p:sp>
         <p:nvSpPr>
-          <p:cNvPr id="12" name="Ag reflector + MLA film / TCTA [10] side"/>
-          <p:cNvSpPr/>
-          <p:nvPr/>
-        </p:nvSpPr>
-        <p:spPr>
-          <a:xfrm>
-            <a:off x="4005843" y="3514451"/>
-            <a:ext cx="278667" cy="452835"/>
-          </a:xfrm>
-          <a:custGeom>
-            <a:avLst/>
-            <a:gdLst/>
-            <a:ahLst/>
-            <a:cxnLst/>
-            <a:rect l="l" t="t" r="r" b="b"/>
-            <a:pathLst>
-              <a:path w="278667" h="452835">
-                <a:moveTo>
-                  <a:pt x="0" y="452835"/>
-                </a:moveTo>
-                <a:lnTo>
-                  <a:pt x="278667" y="278668"/>
-                </a:lnTo>
-                <a:lnTo>
-                  <a:pt x="278667" y="0"/>
-                </a:lnTo>
-                <a:lnTo>
-                  <a:pt x="0" y="174167"/>
-                </a:lnTo>
-                <a:close/>
-              </a:path>
-            </a:pathLst>
-          </a:custGeom>
-          <a:solidFill>
-            <a:srgbClr val="BB904B"/>
-          </a:solidFill>
-          <a:ln w="9525">
-            <a:solidFill>
-              <a:srgbClr val="5D666F"/>
-            </a:solidFill>
-          </a:ln>
-          <a:effectLst/>
-        </p:spPr>
-        <p:style>
-          <a:lnRef idx="1">
-            <a:schemeClr val="accent1"/>
-          </a:lnRef>
-          <a:fillRef idx="3">
-            <a:schemeClr val="accent1"/>
-          </a:fillRef>
-          <a:effectRef idx="2">
-            <a:schemeClr val="accent1"/>
-          </a:effectRef>
-          <a:fontRef idx="minor">
-            <a:schemeClr val="lt1"/>
-          </a:fontRef>
-        </p:style>
-        <p:txBody>
-          <a:bodyPr rtlCol="0" anchor="ctr"/>
-          <a:lstStyle/>
-          <a:p>
-            <a:pPr algn="ctr"/>
-          </a:p>
-        </p:txBody>
-      </p:sp>
-      <p:sp>
-        <p:nvSpPr>
-          <p:cNvPr id="13" name="Ag reflector + MLA film / TCTA [10] label"/>
+          <p:cNvPr id="17" name="Ag reflector + MLA film / TCTA [10] label"/>
           <p:cNvSpPr txBox="1"/>
           <p:nvPr/>
         </p:nvSpPr>
@@ -4240,7 +4508,141 @@
       </p:sp>
       <p:sp>
         <p:nvSpPr>
-          <p:cNvPr id="14" name="Ag reflector + MLA film / TCTA:B3PyMPM:Irppy₂acac [25] front"/>
+          <p:cNvPr id="18" name="Ag reflector + MLA film / TCTA:B3PyMPM:Irppy₂acac [25] left"/>
+          <p:cNvSpPr/>
+          <p:nvPr/>
+        </p:nvSpPr>
+        <p:spPr>
+          <a:xfrm>
+            <a:off x="1197399" y="3200951"/>
+            <a:ext cx="195938" cy="487667"/>
+          </a:xfrm>
+          <a:custGeom>
+            <a:avLst/>
+            <a:gdLst/>
+            <a:ahLst/>
+            <a:cxnLst/>
+            <a:rect l="l" t="t" r="r" b="b"/>
+            <a:pathLst>
+              <a:path w="195938" h="487667">
+                <a:moveTo>
+                  <a:pt x="195938" y="487667"/>
+                </a:moveTo>
+                <a:lnTo>
+                  <a:pt x="0" y="313500"/>
+                </a:lnTo>
+                <a:lnTo>
+                  <a:pt x="0" y="0"/>
+                </a:lnTo>
+                <a:lnTo>
+                  <a:pt x="195938" y="174167"/>
+                </a:lnTo>
+                <a:close/>
+              </a:path>
+            </a:pathLst>
+          </a:custGeom>
+          <a:solidFill>
+            <a:srgbClr val="963131"/>
+          </a:solidFill>
+          <a:ln w="9525">
+            <a:solidFill>
+              <a:srgbClr val="5D666F"/>
+            </a:solidFill>
+          </a:ln>
+          <a:effectLst/>
+        </p:spPr>
+        <p:style>
+          <a:lnRef idx="1">
+            <a:schemeClr val="accent1"/>
+          </a:lnRef>
+          <a:fillRef idx="3">
+            <a:schemeClr val="accent1"/>
+          </a:fillRef>
+          <a:effectRef idx="2">
+            <a:schemeClr val="accent1"/>
+          </a:effectRef>
+          <a:fontRef idx="minor">
+            <a:schemeClr val="lt1"/>
+          </a:fontRef>
+        </p:style>
+        <p:txBody>
+          <a:bodyPr rtlCol="0" anchor="ctr"/>
+          <a:lstStyle/>
+          <a:p>
+            <a:pPr algn="ctr"/>
+          </a:p>
+        </p:txBody>
+      </p:sp>
+      <p:sp>
+        <p:nvSpPr>
+          <p:cNvPr id="19" name="Ag reflector + MLA film / TCTA:B3PyMPM:Irppy₂acac [25] right"/>
+          <p:cNvSpPr/>
+          <p:nvPr/>
+        </p:nvSpPr>
+        <p:spPr>
+          <a:xfrm>
+            <a:off x="4005843" y="3200951"/>
+            <a:ext cx="195938" cy="487667"/>
+          </a:xfrm>
+          <a:custGeom>
+            <a:avLst/>
+            <a:gdLst/>
+            <a:ahLst/>
+            <a:cxnLst/>
+            <a:rect l="l" t="t" r="r" b="b"/>
+            <a:pathLst>
+              <a:path w="195938" h="487667">
+                <a:moveTo>
+                  <a:pt x="0" y="487667"/>
+                </a:moveTo>
+                <a:lnTo>
+                  <a:pt x="195938" y="313500"/>
+                </a:lnTo>
+                <a:lnTo>
+                  <a:pt x="195938" y="0"/>
+                </a:lnTo>
+                <a:lnTo>
+                  <a:pt x="0" y="174167"/>
+                </a:lnTo>
+                <a:close/>
+              </a:path>
+            </a:pathLst>
+          </a:custGeom>
+          <a:solidFill>
+            <a:srgbClr val="963131"/>
+          </a:solidFill>
+          <a:ln w="9525">
+            <a:solidFill>
+              <a:srgbClr val="5D666F"/>
+            </a:solidFill>
+          </a:ln>
+          <a:effectLst/>
+        </p:spPr>
+        <p:style>
+          <a:lnRef idx="1">
+            <a:schemeClr val="accent1"/>
+          </a:lnRef>
+          <a:fillRef idx="3">
+            <a:schemeClr val="accent1"/>
+          </a:fillRef>
+          <a:effectRef idx="2">
+            <a:schemeClr val="accent1"/>
+          </a:effectRef>
+          <a:fontRef idx="minor">
+            <a:schemeClr val="lt1"/>
+          </a:fontRef>
+        </p:style>
+        <p:txBody>
+          <a:bodyPr rtlCol="0" anchor="ctr"/>
+          <a:lstStyle/>
+          <a:p>
+            <a:pPr algn="ctr"/>
+          </a:p>
+        </p:txBody>
+      </p:sp>
+      <p:sp>
+        <p:nvSpPr>
+          <p:cNvPr id="20" name="Ag reflector + MLA film / TCTA:B3PyMPM:Irppy₂acac [25] front"/>
           <p:cNvSpPr/>
           <p:nvPr/>
         </p:nvSpPr>
@@ -4307,74 +4709,7 @@
       </p:sp>
       <p:sp>
         <p:nvSpPr>
-          <p:cNvPr id="15" name="Ag reflector + MLA film / TCTA:B3PyMPM:Irppy₂acac [25] side"/>
-          <p:cNvSpPr/>
-          <p:nvPr/>
-        </p:nvSpPr>
-        <p:spPr>
-          <a:xfrm>
-            <a:off x="4005843" y="3200951"/>
-            <a:ext cx="278667" cy="487667"/>
-          </a:xfrm>
-          <a:custGeom>
-            <a:avLst/>
-            <a:gdLst/>
-            <a:ahLst/>
-            <a:cxnLst/>
-            <a:rect l="l" t="t" r="r" b="b"/>
-            <a:pathLst>
-              <a:path w="278667" h="487667">
-                <a:moveTo>
-                  <a:pt x="0" y="487667"/>
-                </a:moveTo>
-                <a:lnTo>
-                  <a:pt x="278667" y="313500"/>
-                </a:lnTo>
-                <a:lnTo>
-                  <a:pt x="278667" y="0"/>
-                </a:lnTo>
-                <a:lnTo>
-                  <a:pt x="0" y="174167"/>
-                </a:lnTo>
-                <a:close/>
-              </a:path>
-            </a:pathLst>
-          </a:custGeom>
-          <a:solidFill>
-            <a:srgbClr val="8B2D2D"/>
-          </a:solidFill>
-          <a:ln w="9525">
-            <a:solidFill>
-              <a:srgbClr val="5D666F"/>
-            </a:solidFill>
-          </a:ln>
-          <a:effectLst/>
-        </p:spPr>
-        <p:style>
-          <a:lnRef idx="1">
-            <a:schemeClr val="accent1"/>
-          </a:lnRef>
-          <a:fillRef idx="3">
-            <a:schemeClr val="accent1"/>
-          </a:fillRef>
-          <a:effectRef idx="2">
-            <a:schemeClr val="accent1"/>
-          </a:effectRef>
-          <a:fontRef idx="minor">
-            <a:schemeClr val="lt1"/>
-          </a:fontRef>
-        </p:style>
-        <p:txBody>
-          <a:bodyPr rtlCol="0" anchor="ctr"/>
-          <a:lstStyle/>
-          <a:p>
-            <a:pPr algn="ctr"/>
-          </a:p>
-        </p:txBody>
-      </p:sp>
-      <p:sp>
-        <p:nvSpPr>
-          <p:cNvPr id="16" name="Ag reflector + MLA film / TCTA:B3PyMPM:Irppy₂acac [25] label"/>
+          <p:cNvPr id="21" name="Ag reflector + MLA film / TCTA:B3PyMPM:Irppy₂acac [25] label"/>
           <p:cNvSpPr txBox="1"/>
           <p:nvPr/>
         </p:nvSpPr>
@@ -4427,7 +4762,141 @@
       </p:sp>
       <p:sp>
         <p:nvSpPr>
-          <p:cNvPr id="17" name="Ag reflector + MLA film / B3PyMPM [50] front"/>
+          <p:cNvPr id="22" name="Ag reflector + MLA film / B3PyMPM [50] left"/>
+          <p:cNvSpPr/>
+          <p:nvPr/>
+        </p:nvSpPr>
+        <p:spPr>
+          <a:xfrm>
+            <a:off x="1197399" y="2913575"/>
+            <a:ext cx="195938" cy="461543"/>
+          </a:xfrm>
+          <a:custGeom>
+            <a:avLst/>
+            <a:gdLst/>
+            <a:ahLst/>
+            <a:cxnLst/>
+            <a:rect l="l" t="t" r="r" b="b"/>
+            <a:pathLst>
+              <a:path w="195938" h="461543">
+                <a:moveTo>
+                  <a:pt x="195938" y="461543"/>
+                </a:moveTo>
+                <a:lnTo>
+                  <a:pt x="0" y="287376"/>
+                </a:lnTo>
+                <a:lnTo>
+                  <a:pt x="0" y="0"/>
+                </a:lnTo>
+                <a:lnTo>
+                  <a:pt x="195938" y="174167"/>
+                </a:lnTo>
+                <a:close/>
+              </a:path>
+            </a:pathLst>
+          </a:custGeom>
+          <a:solidFill>
+            <a:srgbClr val="6B81B7"/>
+          </a:solidFill>
+          <a:ln w="9525">
+            <a:solidFill>
+              <a:srgbClr val="5D666F"/>
+            </a:solidFill>
+          </a:ln>
+          <a:effectLst/>
+        </p:spPr>
+        <p:style>
+          <a:lnRef idx="1">
+            <a:schemeClr val="accent1"/>
+          </a:lnRef>
+          <a:fillRef idx="3">
+            <a:schemeClr val="accent1"/>
+          </a:fillRef>
+          <a:effectRef idx="2">
+            <a:schemeClr val="accent1"/>
+          </a:effectRef>
+          <a:fontRef idx="minor">
+            <a:schemeClr val="lt1"/>
+          </a:fontRef>
+        </p:style>
+        <p:txBody>
+          <a:bodyPr rtlCol="0" anchor="ctr"/>
+          <a:lstStyle/>
+          <a:p>
+            <a:pPr algn="ctr"/>
+          </a:p>
+        </p:txBody>
+      </p:sp>
+      <p:sp>
+        <p:nvSpPr>
+          <p:cNvPr id="23" name="Ag reflector + MLA film / B3PyMPM [50] right"/>
+          <p:cNvSpPr/>
+          <p:nvPr/>
+        </p:nvSpPr>
+        <p:spPr>
+          <a:xfrm>
+            <a:off x="4005843" y="2913575"/>
+            <a:ext cx="195938" cy="461543"/>
+          </a:xfrm>
+          <a:custGeom>
+            <a:avLst/>
+            <a:gdLst/>
+            <a:ahLst/>
+            <a:cxnLst/>
+            <a:rect l="l" t="t" r="r" b="b"/>
+            <a:pathLst>
+              <a:path w="195938" h="461543">
+                <a:moveTo>
+                  <a:pt x="0" y="461543"/>
+                </a:moveTo>
+                <a:lnTo>
+                  <a:pt x="195938" y="287376"/>
+                </a:lnTo>
+                <a:lnTo>
+                  <a:pt x="195938" y="0"/>
+                </a:lnTo>
+                <a:lnTo>
+                  <a:pt x="0" y="174167"/>
+                </a:lnTo>
+                <a:close/>
+              </a:path>
+            </a:pathLst>
+          </a:custGeom>
+          <a:solidFill>
+            <a:srgbClr val="6B81B7"/>
+          </a:solidFill>
+          <a:ln w="9525">
+            <a:solidFill>
+              <a:srgbClr val="5D666F"/>
+            </a:solidFill>
+          </a:ln>
+          <a:effectLst/>
+        </p:spPr>
+        <p:style>
+          <a:lnRef idx="1">
+            <a:schemeClr val="accent1"/>
+          </a:lnRef>
+          <a:fillRef idx="3">
+            <a:schemeClr val="accent1"/>
+          </a:fillRef>
+          <a:effectRef idx="2">
+            <a:schemeClr val="accent1"/>
+          </a:effectRef>
+          <a:fontRef idx="minor">
+            <a:schemeClr val="lt1"/>
+          </a:fontRef>
+        </p:style>
+        <p:txBody>
+          <a:bodyPr rtlCol="0" anchor="ctr"/>
+          <a:lstStyle/>
+          <a:p>
+            <a:pPr algn="ctr"/>
+          </a:p>
+        </p:txBody>
+      </p:sp>
+      <p:sp>
+        <p:nvSpPr>
+          <p:cNvPr id="24" name="Ag reflector + MLA film / B3PyMPM [50] front"/>
           <p:cNvSpPr/>
           <p:nvPr/>
         </p:nvSpPr>
@@ -4494,74 +4963,7 @@
       </p:sp>
       <p:sp>
         <p:nvSpPr>
-          <p:cNvPr id="18" name="Ag reflector + MLA film / B3PyMPM [50] side"/>
-          <p:cNvSpPr/>
-          <p:nvPr/>
-        </p:nvSpPr>
-        <p:spPr>
-          <a:xfrm>
-            <a:off x="4005843" y="2913575"/>
-            <a:ext cx="278667" cy="461543"/>
-          </a:xfrm>
-          <a:custGeom>
-            <a:avLst/>
-            <a:gdLst/>
-            <a:ahLst/>
-            <a:cxnLst/>
-            <a:rect l="l" t="t" r="r" b="b"/>
-            <a:pathLst>
-              <a:path w="278667" h="461543">
-                <a:moveTo>
-                  <a:pt x="0" y="461543"/>
-                </a:moveTo>
-                <a:lnTo>
-                  <a:pt x="278667" y="287376"/>
-                </a:lnTo>
-                <a:lnTo>
-                  <a:pt x="278667" y="0"/>
-                </a:lnTo>
-                <a:lnTo>
-                  <a:pt x="0" y="174167"/>
-                </a:lnTo>
-                <a:close/>
-              </a:path>
-            </a:pathLst>
-          </a:custGeom>
-          <a:solidFill>
-            <a:srgbClr val="6378AA"/>
-          </a:solidFill>
-          <a:ln w="9525">
-            <a:solidFill>
-              <a:srgbClr val="5D666F"/>
-            </a:solidFill>
-          </a:ln>
-          <a:effectLst/>
-        </p:spPr>
-        <p:style>
-          <a:lnRef idx="1">
-            <a:schemeClr val="accent1"/>
-          </a:lnRef>
-          <a:fillRef idx="3">
-            <a:schemeClr val="accent1"/>
-          </a:fillRef>
-          <a:effectRef idx="2">
-            <a:schemeClr val="accent1"/>
-          </a:effectRef>
-          <a:fontRef idx="minor">
-            <a:schemeClr val="lt1"/>
-          </a:fontRef>
-        </p:style>
-        <p:txBody>
-          <a:bodyPr rtlCol="0" anchor="ctr"/>
-          <a:lstStyle/>
-          <a:p>
-            <a:pPr algn="ctr"/>
-          </a:p>
-        </p:txBody>
-      </p:sp>
-      <p:sp>
-        <p:nvSpPr>
-          <p:cNvPr id="19" name="Ag reflector + MLA film / B3PyMPM [50] label"/>
+          <p:cNvPr id="25" name="Ag reflector + MLA film / B3PyMPM [50] label"/>
           <p:cNvSpPr txBox="1"/>
           <p:nvPr/>
         </p:nvSpPr>
@@ -4596,7 +4998,141 @@
       </p:sp>
       <p:sp>
         <p:nvSpPr>
-          <p:cNvPr id="20" name="Ag reflector + MLA film / B3PyMPM:Cs₂CO₃ [5] front"/>
+          <p:cNvPr id="26" name="Ag reflector + MLA film / B3PyMPM:Cs₂CO₃ [5] left"/>
+          <p:cNvSpPr/>
+          <p:nvPr/>
+        </p:nvSpPr>
+        <p:spPr>
+          <a:xfrm>
+            <a:off x="1197399" y="2634908"/>
+            <a:ext cx="195938" cy="452834"/>
+          </a:xfrm>
+          <a:custGeom>
+            <a:avLst/>
+            <a:gdLst/>
+            <a:ahLst/>
+            <a:cxnLst/>
+            <a:rect l="l" t="t" r="r" b="b"/>
+            <a:pathLst>
+              <a:path w="195938" h="452834">
+                <a:moveTo>
+                  <a:pt x="195938" y="452834"/>
+                </a:moveTo>
+                <a:lnTo>
+                  <a:pt x="0" y="278667"/>
+                </a:lnTo>
+                <a:lnTo>
+                  <a:pt x="0" y="0"/>
+                </a:lnTo>
+                <a:lnTo>
+                  <a:pt x="195938" y="174167"/>
+                </a:lnTo>
+                <a:close/>
+              </a:path>
+            </a:pathLst>
+          </a:custGeom>
+          <a:solidFill>
+            <a:srgbClr val="3A518D"/>
+          </a:solidFill>
+          <a:ln w="9525">
+            <a:solidFill>
+              <a:srgbClr val="5D666F"/>
+            </a:solidFill>
+          </a:ln>
+          <a:effectLst/>
+        </p:spPr>
+        <p:style>
+          <a:lnRef idx="1">
+            <a:schemeClr val="accent1"/>
+          </a:lnRef>
+          <a:fillRef idx="3">
+            <a:schemeClr val="accent1"/>
+          </a:fillRef>
+          <a:effectRef idx="2">
+            <a:schemeClr val="accent1"/>
+          </a:effectRef>
+          <a:fontRef idx="minor">
+            <a:schemeClr val="lt1"/>
+          </a:fontRef>
+        </p:style>
+        <p:txBody>
+          <a:bodyPr rtlCol="0" anchor="ctr"/>
+          <a:lstStyle/>
+          <a:p>
+            <a:pPr algn="ctr"/>
+          </a:p>
+        </p:txBody>
+      </p:sp>
+      <p:sp>
+        <p:nvSpPr>
+          <p:cNvPr id="27" name="Ag reflector + MLA film / B3PyMPM:Cs₂CO₃ [5] right"/>
+          <p:cNvSpPr/>
+          <p:nvPr/>
+        </p:nvSpPr>
+        <p:spPr>
+          <a:xfrm>
+            <a:off x="4005843" y="2634908"/>
+            <a:ext cx="195938" cy="452834"/>
+          </a:xfrm>
+          <a:custGeom>
+            <a:avLst/>
+            <a:gdLst/>
+            <a:ahLst/>
+            <a:cxnLst/>
+            <a:rect l="l" t="t" r="r" b="b"/>
+            <a:pathLst>
+              <a:path w="195938" h="452834">
+                <a:moveTo>
+                  <a:pt x="0" y="452834"/>
+                </a:moveTo>
+                <a:lnTo>
+                  <a:pt x="195938" y="278667"/>
+                </a:lnTo>
+                <a:lnTo>
+                  <a:pt x="195938" y="0"/>
+                </a:lnTo>
+                <a:lnTo>
+                  <a:pt x="0" y="174167"/>
+                </a:lnTo>
+                <a:close/>
+              </a:path>
+            </a:pathLst>
+          </a:custGeom>
+          <a:solidFill>
+            <a:srgbClr val="3A518D"/>
+          </a:solidFill>
+          <a:ln w="9525">
+            <a:solidFill>
+              <a:srgbClr val="5D666F"/>
+            </a:solidFill>
+          </a:ln>
+          <a:effectLst/>
+        </p:spPr>
+        <p:style>
+          <a:lnRef idx="1">
+            <a:schemeClr val="accent1"/>
+          </a:lnRef>
+          <a:fillRef idx="3">
+            <a:schemeClr val="accent1"/>
+          </a:fillRef>
+          <a:effectRef idx="2">
+            <a:schemeClr val="accent1"/>
+          </a:effectRef>
+          <a:fontRef idx="minor">
+            <a:schemeClr val="lt1"/>
+          </a:fontRef>
+        </p:style>
+        <p:txBody>
+          <a:bodyPr rtlCol="0" anchor="ctr"/>
+          <a:lstStyle/>
+          <a:p>
+            <a:pPr algn="ctr"/>
+          </a:p>
+        </p:txBody>
+      </p:sp>
+      <p:sp>
+        <p:nvSpPr>
+          <p:cNvPr id="28" name="Ag reflector + MLA film / B3PyMPM:Cs₂CO₃ [5] front"/>
           <p:cNvSpPr/>
           <p:nvPr/>
         </p:nvSpPr>
@@ -4663,74 +5199,7 @@
       </p:sp>
       <p:sp>
         <p:nvSpPr>
-          <p:cNvPr id="21" name="Ag reflector + MLA film / B3PyMPM:Cs₂CO₃ [5] side"/>
-          <p:cNvSpPr/>
-          <p:nvPr/>
-        </p:nvSpPr>
-        <p:spPr>
-          <a:xfrm>
-            <a:off x="4005843" y="2634908"/>
-            <a:ext cx="278667" cy="452834"/>
-          </a:xfrm>
-          <a:custGeom>
-            <a:avLst/>
-            <a:gdLst/>
-            <a:ahLst/>
-            <a:cxnLst/>
-            <a:rect l="l" t="t" r="r" b="b"/>
-            <a:pathLst>
-              <a:path w="278667" h="452834">
-                <a:moveTo>
-                  <a:pt x="0" y="452834"/>
-                </a:moveTo>
-                <a:lnTo>
-                  <a:pt x="278667" y="278667"/>
-                </a:lnTo>
-                <a:lnTo>
-                  <a:pt x="278667" y="0"/>
-                </a:lnTo>
-                <a:lnTo>
-                  <a:pt x="0" y="174167"/>
-                </a:lnTo>
-                <a:close/>
-              </a:path>
-            </a:pathLst>
-          </a:custGeom>
-          <a:solidFill>
-            <a:srgbClr val="364B83"/>
-          </a:solidFill>
-          <a:ln w="9525">
-            <a:solidFill>
-              <a:srgbClr val="5D666F"/>
-            </a:solidFill>
-          </a:ln>
-          <a:effectLst/>
-        </p:spPr>
-        <p:style>
-          <a:lnRef idx="1">
-            <a:schemeClr val="accent1"/>
-          </a:lnRef>
-          <a:fillRef idx="3">
-            <a:schemeClr val="accent1"/>
-          </a:fillRef>
-          <a:effectRef idx="2">
-            <a:schemeClr val="accent1"/>
-          </a:effectRef>
-          <a:fontRef idx="minor">
-            <a:schemeClr val="lt1"/>
-          </a:fontRef>
-        </p:style>
-        <p:txBody>
-          <a:bodyPr rtlCol="0" anchor="ctr"/>
-          <a:lstStyle/>
-          <a:p>
-            <a:pPr algn="ctr"/>
-          </a:p>
-        </p:txBody>
-      </p:sp>
-      <p:sp>
-        <p:nvSpPr>
-          <p:cNvPr id="22" name="Ag reflector + MLA film / B3PyMPM:Cs₂CO₃ [5] label"/>
+          <p:cNvPr id="29" name="Ag reflector + MLA film / B3PyMPM:Cs₂CO₃ [5] label"/>
           <p:cNvSpPr txBox="1"/>
           <p:nvPr/>
         </p:nvSpPr>
@@ -4801,7 +5270,141 @@
       </p:sp>
       <p:sp>
         <p:nvSpPr>
-          <p:cNvPr id="23" name="Ag reflector + MLA film / Ag [100] front"/>
+          <p:cNvPr id="30" name="Ag reflector + MLA film / Ag [100] left"/>
+          <p:cNvSpPr/>
+          <p:nvPr/>
+        </p:nvSpPr>
+        <p:spPr>
+          <a:xfrm>
+            <a:off x="1197399" y="2356240"/>
+            <a:ext cx="195938" cy="452835"/>
+          </a:xfrm>
+          <a:custGeom>
+            <a:avLst/>
+            <a:gdLst/>
+            <a:ahLst/>
+            <a:cxnLst/>
+            <a:rect l="l" t="t" r="r" b="b"/>
+            <a:pathLst>
+              <a:path w="195938" h="452835">
+                <a:moveTo>
+                  <a:pt x="195938" y="452835"/>
+                </a:moveTo>
+                <a:lnTo>
+                  <a:pt x="0" y="278668"/>
+                </a:lnTo>
+                <a:lnTo>
+                  <a:pt x="0" y="0"/>
+                </a:lnTo>
+                <a:lnTo>
+                  <a:pt x="195938" y="174167"/>
+                </a:lnTo>
+                <a:close/>
+              </a:path>
+            </a:pathLst>
+          </a:custGeom>
+          <a:solidFill>
+            <a:srgbClr val="A9ADB1"/>
+          </a:solidFill>
+          <a:ln w="9525">
+            <a:solidFill>
+              <a:srgbClr val="5D666F"/>
+            </a:solidFill>
+          </a:ln>
+          <a:effectLst/>
+        </p:spPr>
+        <p:style>
+          <a:lnRef idx="1">
+            <a:schemeClr val="accent1"/>
+          </a:lnRef>
+          <a:fillRef idx="3">
+            <a:schemeClr val="accent1"/>
+          </a:fillRef>
+          <a:effectRef idx="2">
+            <a:schemeClr val="accent1"/>
+          </a:effectRef>
+          <a:fontRef idx="minor">
+            <a:schemeClr val="lt1"/>
+          </a:fontRef>
+        </p:style>
+        <p:txBody>
+          <a:bodyPr rtlCol="0" anchor="ctr"/>
+          <a:lstStyle/>
+          <a:p>
+            <a:pPr algn="ctr"/>
+          </a:p>
+        </p:txBody>
+      </p:sp>
+      <p:sp>
+        <p:nvSpPr>
+          <p:cNvPr id="31" name="Ag reflector + MLA film / Ag [100] right"/>
+          <p:cNvSpPr/>
+          <p:nvPr/>
+        </p:nvSpPr>
+        <p:spPr>
+          <a:xfrm>
+            <a:off x="4005843" y="2356240"/>
+            <a:ext cx="195938" cy="452835"/>
+          </a:xfrm>
+          <a:custGeom>
+            <a:avLst/>
+            <a:gdLst/>
+            <a:ahLst/>
+            <a:cxnLst/>
+            <a:rect l="l" t="t" r="r" b="b"/>
+            <a:pathLst>
+              <a:path w="195938" h="452835">
+                <a:moveTo>
+                  <a:pt x="0" y="452835"/>
+                </a:moveTo>
+                <a:lnTo>
+                  <a:pt x="195938" y="278668"/>
+                </a:lnTo>
+                <a:lnTo>
+                  <a:pt x="195938" y="0"/>
+                </a:lnTo>
+                <a:lnTo>
+                  <a:pt x="0" y="174167"/>
+                </a:lnTo>
+                <a:close/>
+              </a:path>
+            </a:pathLst>
+          </a:custGeom>
+          <a:solidFill>
+            <a:srgbClr val="A9ADB1"/>
+          </a:solidFill>
+          <a:ln w="9525">
+            <a:solidFill>
+              <a:srgbClr val="5D666F"/>
+            </a:solidFill>
+          </a:ln>
+          <a:effectLst/>
+        </p:spPr>
+        <p:style>
+          <a:lnRef idx="1">
+            <a:schemeClr val="accent1"/>
+          </a:lnRef>
+          <a:fillRef idx="3">
+            <a:schemeClr val="accent1"/>
+          </a:fillRef>
+          <a:effectRef idx="2">
+            <a:schemeClr val="accent1"/>
+          </a:effectRef>
+          <a:fontRef idx="minor">
+            <a:schemeClr val="lt1"/>
+          </a:fontRef>
+        </p:style>
+        <p:txBody>
+          <a:bodyPr rtlCol="0" anchor="ctr"/>
+          <a:lstStyle/>
+          <a:p>
+            <a:pPr algn="ctr"/>
+          </a:p>
+        </p:txBody>
+      </p:sp>
+      <p:sp>
+        <p:nvSpPr>
+          <p:cNvPr id="32" name="Ag reflector + MLA film / Ag [100] front"/>
           <p:cNvSpPr/>
           <p:nvPr/>
         </p:nvSpPr>
@@ -4868,74 +5471,7 @@
       </p:sp>
       <p:sp>
         <p:nvSpPr>
-          <p:cNvPr id="24" name="Ag reflector + MLA film / Ag [100] side"/>
-          <p:cNvSpPr/>
-          <p:nvPr/>
-        </p:nvSpPr>
-        <p:spPr>
-          <a:xfrm>
-            <a:off x="4005843" y="2356240"/>
-            <a:ext cx="278667" cy="452835"/>
-          </a:xfrm>
-          <a:custGeom>
-            <a:avLst/>
-            <a:gdLst/>
-            <a:ahLst/>
-            <a:cxnLst/>
-            <a:rect l="l" t="t" r="r" b="b"/>
-            <a:pathLst>
-              <a:path w="278667" h="452835">
-                <a:moveTo>
-                  <a:pt x="0" y="452835"/>
-                </a:moveTo>
-                <a:lnTo>
-                  <a:pt x="278667" y="278668"/>
-                </a:lnTo>
-                <a:lnTo>
-                  <a:pt x="278667" y="0"/>
-                </a:lnTo>
-                <a:lnTo>
-                  <a:pt x="0" y="174167"/>
-                </a:lnTo>
-                <a:close/>
-              </a:path>
-            </a:pathLst>
-          </a:custGeom>
-          <a:solidFill>
-            <a:srgbClr val="9DA1A5"/>
-          </a:solidFill>
-          <a:ln w="9525">
-            <a:solidFill>
-              <a:srgbClr val="5D666F"/>
-            </a:solidFill>
-          </a:ln>
-          <a:effectLst/>
-        </p:spPr>
-        <p:style>
-          <a:lnRef idx="1">
-            <a:schemeClr val="accent1"/>
-          </a:lnRef>
-          <a:fillRef idx="3">
-            <a:schemeClr val="accent1"/>
-          </a:fillRef>
-          <a:effectRef idx="2">
-            <a:schemeClr val="accent1"/>
-          </a:effectRef>
-          <a:fontRef idx="minor">
-            <a:schemeClr val="lt1"/>
-          </a:fontRef>
-        </p:style>
-        <p:txBody>
-          <a:bodyPr rtlCol="0" anchor="ctr"/>
-          <a:lstStyle/>
-          <a:p>
-            <a:pPr algn="ctr"/>
-          </a:p>
-        </p:txBody>
-      </p:sp>
-      <p:sp>
-        <p:nvSpPr>
-          <p:cNvPr id="25" name="Ag reflector + MLA film / Ag [100] label"/>
+          <p:cNvPr id="33" name="Ag reflector + MLA film / Ag [100] label"/>
           <p:cNvSpPr txBox="1"/>
           <p:nvPr/>
         </p:nvSpPr>
@@ -4970,7 +5506,141 @@
       </p:sp>
       <p:sp>
         <p:nvSpPr>
-          <p:cNvPr id="26" name="Ag reflector + MLA film / Nanolaminate front"/>
+          <p:cNvPr id="34" name="Ag reflector + MLA film / Nanolaminate left"/>
+          <p:cNvSpPr/>
+          <p:nvPr/>
+        </p:nvSpPr>
+        <p:spPr>
+          <a:xfrm>
+            <a:off x="1197399" y="2068865"/>
+            <a:ext cx="195938" cy="461542"/>
+          </a:xfrm>
+          <a:custGeom>
+            <a:avLst/>
+            <a:gdLst/>
+            <a:ahLst/>
+            <a:cxnLst/>
+            <a:rect l="l" t="t" r="r" b="b"/>
+            <a:pathLst>
+              <a:path w="195938" h="461542">
+                <a:moveTo>
+                  <a:pt x="195938" y="461542"/>
+                </a:moveTo>
+                <a:lnTo>
+                  <a:pt x="0" y="287375"/>
+                </a:lnTo>
+                <a:lnTo>
+                  <a:pt x="0" y="0"/>
+                </a:lnTo>
+                <a:lnTo>
+                  <a:pt x="195938" y="174167"/>
+                </a:lnTo>
+                <a:close/>
+              </a:path>
+            </a:pathLst>
+          </a:custGeom>
+          <a:solidFill>
+            <a:srgbClr val="B6C1BE"/>
+          </a:solidFill>
+          <a:ln w="9525">
+            <a:solidFill>
+              <a:srgbClr val="5D666F"/>
+            </a:solidFill>
+          </a:ln>
+          <a:effectLst/>
+        </p:spPr>
+        <p:style>
+          <a:lnRef idx="1">
+            <a:schemeClr val="accent1"/>
+          </a:lnRef>
+          <a:fillRef idx="3">
+            <a:schemeClr val="accent1"/>
+          </a:fillRef>
+          <a:effectRef idx="2">
+            <a:schemeClr val="accent1"/>
+          </a:effectRef>
+          <a:fontRef idx="minor">
+            <a:schemeClr val="lt1"/>
+          </a:fontRef>
+        </p:style>
+        <p:txBody>
+          <a:bodyPr rtlCol="0" anchor="ctr"/>
+          <a:lstStyle/>
+          <a:p>
+            <a:pPr algn="ctr"/>
+          </a:p>
+        </p:txBody>
+      </p:sp>
+      <p:sp>
+        <p:nvSpPr>
+          <p:cNvPr id="35" name="Ag reflector + MLA film / Nanolaminate right"/>
+          <p:cNvSpPr/>
+          <p:nvPr/>
+        </p:nvSpPr>
+        <p:spPr>
+          <a:xfrm>
+            <a:off x="4005843" y="2068865"/>
+            <a:ext cx="195938" cy="461542"/>
+          </a:xfrm>
+          <a:custGeom>
+            <a:avLst/>
+            <a:gdLst/>
+            <a:ahLst/>
+            <a:cxnLst/>
+            <a:rect l="l" t="t" r="r" b="b"/>
+            <a:pathLst>
+              <a:path w="195938" h="461542">
+                <a:moveTo>
+                  <a:pt x="0" y="461542"/>
+                </a:moveTo>
+                <a:lnTo>
+                  <a:pt x="195938" y="287375"/>
+                </a:lnTo>
+                <a:lnTo>
+                  <a:pt x="195938" y="0"/>
+                </a:lnTo>
+                <a:lnTo>
+                  <a:pt x="0" y="174167"/>
+                </a:lnTo>
+                <a:close/>
+              </a:path>
+            </a:pathLst>
+          </a:custGeom>
+          <a:solidFill>
+            <a:srgbClr val="B6C1BE"/>
+          </a:solidFill>
+          <a:ln w="9525">
+            <a:solidFill>
+              <a:srgbClr val="5D666F"/>
+            </a:solidFill>
+          </a:ln>
+          <a:effectLst/>
+        </p:spPr>
+        <p:style>
+          <a:lnRef idx="1">
+            <a:schemeClr val="accent1"/>
+          </a:lnRef>
+          <a:fillRef idx="3">
+            <a:schemeClr val="accent1"/>
+          </a:fillRef>
+          <a:effectRef idx="2">
+            <a:schemeClr val="accent1"/>
+          </a:effectRef>
+          <a:fontRef idx="minor">
+            <a:schemeClr val="lt1"/>
+          </a:fontRef>
+        </p:style>
+        <p:txBody>
+          <a:bodyPr rtlCol="0" anchor="ctr"/>
+          <a:lstStyle/>
+          <a:p>
+            <a:pPr algn="ctr"/>
+          </a:p>
+        </p:txBody>
+      </p:sp>
+      <p:sp>
+        <p:nvSpPr>
+          <p:cNvPr id="36" name="Ag reflector + MLA film / Nanolaminate front"/>
           <p:cNvSpPr/>
           <p:nvPr/>
         </p:nvSpPr>
@@ -5037,74 +5707,7 @@
       </p:sp>
       <p:sp>
         <p:nvSpPr>
-          <p:cNvPr id="27" name="Ag reflector + MLA film / Nanolaminate side"/>
-          <p:cNvSpPr/>
-          <p:nvPr/>
-        </p:nvSpPr>
-        <p:spPr>
-          <a:xfrm>
-            <a:off x="4005843" y="2068865"/>
-            <a:ext cx="278667" cy="461542"/>
-          </a:xfrm>
-          <a:custGeom>
-            <a:avLst/>
-            <a:gdLst/>
-            <a:ahLst/>
-            <a:cxnLst/>
-            <a:rect l="l" t="t" r="r" b="b"/>
-            <a:pathLst>
-              <a:path w="278667" h="461542">
-                <a:moveTo>
-                  <a:pt x="0" y="461542"/>
-                </a:moveTo>
-                <a:lnTo>
-                  <a:pt x="278667" y="287375"/>
-                </a:lnTo>
-                <a:lnTo>
-                  <a:pt x="278667" y="0"/>
-                </a:lnTo>
-                <a:lnTo>
-                  <a:pt x="0" y="174167"/>
-                </a:lnTo>
-                <a:close/>
-              </a:path>
-            </a:pathLst>
-          </a:custGeom>
-          <a:solidFill>
-            <a:srgbClr val="A9B3B0"/>
-          </a:solidFill>
-          <a:ln w="9525">
-            <a:solidFill>
-              <a:srgbClr val="5D666F"/>
-            </a:solidFill>
-          </a:ln>
-          <a:effectLst/>
-        </p:spPr>
-        <p:style>
-          <a:lnRef idx="1">
-            <a:schemeClr val="accent1"/>
-          </a:lnRef>
-          <a:fillRef idx="3">
-            <a:schemeClr val="accent1"/>
-          </a:fillRef>
-          <a:effectRef idx="2">
-            <a:schemeClr val="accent1"/>
-          </a:effectRef>
-          <a:fontRef idx="minor">
-            <a:schemeClr val="lt1"/>
-          </a:fontRef>
-        </p:style>
-        <p:txBody>
-          <a:bodyPr rtlCol="0" anchor="ctr"/>
-          <a:lstStyle/>
-          <a:p>
-            <a:pPr algn="ctr"/>
-          </a:p>
-        </p:txBody>
-      </p:sp>
-      <p:sp>
-        <p:nvSpPr>
-          <p:cNvPr id="28" name="Ag reflector + MLA film / Nanolaminate label"/>
+          <p:cNvPr id="37" name="Ag reflector + MLA film / Nanolaminate label"/>
           <p:cNvSpPr txBox="1"/>
           <p:nvPr/>
         </p:nvSpPr>
@@ -5139,7 +5742,141 @@
       </p:sp>
       <p:sp>
         <p:nvSpPr>
-          <p:cNvPr id="29" name="Ag reflector + MLA film / Parylene-C [3000] front"/>
+          <p:cNvPr id="38" name="Ag reflector + MLA film / Parylene-C [3000] left"/>
+          <p:cNvSpPr/>
+          <p:nvPr/>
+        </p:nvSpPr>
+        <p:spPr>
+          <a:xfrm>
+            <a:off x="1197399" y="1720531"/>
+            <a:ext cx="195938" cy="522501"/>
+          </a:xfrm>
+          <a:custGeom>
+            <a:avLst/>
+            <a:gdLst/>
+            <a:ahLst/>
+            <a:cxnLst/>
+            <a:rect l="l" t="t" r="r" b="b"/>
+            <a:pathLst>
+              <a:path w="195938" h="522501">
+                <a:moveTo>
+                  <a:pt x="195938" y="522501"/>
+                </a:moveTo>
+                <a:lnTo>
+                  <a:pt x="0" y="348334"/>
+                </a:lnTo>
+                <a:lnTo>
+                  <a:pt x="0" y="0"/>
+                </a:lnTo>
+                <a:lnTo>
+                  <a:pt x="195938" y="174167"/>
+                </a:lnTo>
+                <a:close/>
+              </a:path>
+            </a:pathLst>
+          </a:custGeom>
+          <a:solidFill>
+            <a:srgbClr val="BEB9C9"/>
+          </a:solidFill>
+          <a:ln w="9525">
+            <a:solidFill>
+              <a:srgbClr val="5D666F"/>
+            </a:solidFill>
+          </a:ln>
+          <a:effectLst/>
+        </p:spPr>
+        <p:style>
+          <a:lnRef idx="1">
+            <a:schemeClr val="accent1"/>
+          </a:lnRef>
+          <a:fillRef idx="3">
+            <a:schemeClr val="accent1"/>
+          </a:fillRef>
+          <a:effectRef idx="2">
+            <a:schemeClr val="accent1"/>
+          </a:effectRef>
+          <a:fontRef idx="minor">
+            <a:schemeClr val="lt1"/>
+          </a:fontRef>
+        </p:style>
+        <p:txBody>
+          <a:bodyPr rtlCol="0" anchor="ctr"/>
+          <a:lstStyle/>
+          <a:p>
+            <a:pPr algn="ctr"/>
+          </a:p>
+        </p:txBody>
+      </p:sp>
+      <p:sp>
+        <p:nvSpPr>
+          <p:cNvPr id="39" name="Ag reflector + MLA film / Parylene-C [3000] right"/>
+          <p:cNvSpPr/>
+          <p:nvPr/>
+        </p:nvSpPr>
+        <p:spPr>
+          <a:xfrm>
+            <a:off x="4005843" y="1720531"/>
+            <a:ext cx="195938" cy="522501"/>
+          </a:xfrm>
+          <a:custGeom>
+            <a:avLst/>
+            <a:gdLst/>
+            <a:ahLst/>
+            <a:cxnLst/>
+            <a:rect l="l" t="t" r="r" b="b"/>
+            <a:pathLst>
+              <a:path w="195938" h="522501">
+                <a:moveTo>
+                  <a:pt x="0" y="522501"/>
+                </a:moveTo>
+                <a:lnTo>
+                  <a:pt x="195938" y="348334"/>
+                </a:lnTo>
+                <a:lnTo>
+                  <a:pt x="195938" y="0"/>
+                </a:lnTo>
+                <a:lnTo>
+                  <a:pt x="0" y="174167"/>
+                </a:lnTo>
+                <a:close/>
+              </a:path>
+            </a:pathLst>
+          </a:custGeom>
+          <a:solidFill>
+            <a:srgbClr val="BEB9C9"/>
+          </a:solidFill>
+          <a:ln w="9525">
+            <a:solidFill>
+              <a:srgbClr val="5D666F"/>
+            </a:solidFill>
+          </a:ln>
+          <a:effectLst/>
+        </p:spPr>
+        <p:style>
+          <a:lnRef idx="1">
+            <a:schemeClr val="accent1"/>
+          </a:lnRef>
+          <a:fillRef idx="3">
+            <a:schemeClr val="accent1"/>
+          </a:fillRef>
+          <a:effectRef idx="2">
+            <a:schemeClr val="accent1"/>
+          </a:effectRef>
+          <a:fontRef idx="minor">
+            <a:schemeClr val="lt1"/>
+          </a:fontRef>
+        </p:style>
+        <p:txBody>
+          <a:bodyPr rtlCol="0" anchor="ctr"/>
+          <a:lstStyle/>
+          <a:p>
+            <a:pPr algn="ctr"/>
+          </a:p>
+        </p:txBody>
+      </p:sp>
+      <p:sp>
+        <p:nvSpPr>
+          <p:cNvPr id="40" name="Ag reflector + MLA film / Parylene-C [3000] front"/>
           <p:cNvSpPr/>
           <p:nvPr/>
         </p:nvSpPr>
@@ -5206,74 +5943,7 @@
       </p:sp>
       <p:sp>
         <p:nvSpPr>
-          <p:cNvPr id="30" name="Ag reflector + MLA film / Parylene-C [3000] side"/>
-          <p:cNvSpPr/>
-          <p:nvPr/>
-        </p:nvSpPr>
-        <p:spPr>
-          <a:xfrm>
-            <a:off x="4005843" y="1720531"/>
-            <a:ext cx="278667" cy="522501"/>
-          </a:xfrm>
-          <a:custGeom>
-            <a:avLst/>
-            <a:gdLst/>
-            <a:ahLst/>
-            <a:cxnLst/>
-            <a:rect l="l" t="t" r="r" b="b"/>
-            <a:pathLst>
-              <a:path w="278667" h="522501">
-                <a:moveTo>
-                  <a:pt x="0" y="522501"/>
-                </a:moveTo>
-                <a:lnTo>
-                  <a:pt x="278667" y="348334"/>
-                </a:lnTo>
-                <a:lnTo>
-                  <a:pt x="278667" y="0"/>
-                </a:lnTo>
-                <a:lnTo>
-                  <a:pt x="0" y="174167"/>
-                </a:lnTo>
-                <a:close/>
-              </a:path>
-            </a:pathLst>
-          </a:custGeom>
-          <a:solidFill>
-            <a:srgbClr val="B0ACBA"/>
-          </a:solidFill>
-          <a:ln w="9525">
-            <a:solidFill>
-              <a:srgbClr val="5D666F"/>
-            </a:solidFill>
-          </a:ln>
-          <a:effectLst/>
-        </p:spPr>
-        <p:style>
-          <a:lnRef idx="1">
-            <a:schemeClr val="accent1"/>
-          </a:lnRef>
-          <a:fillRef idx="3">
-            <a:schemeClr val="accent1"/>
-          </a:fillRef>
-          <a:effectRef idx="2">
-            <a:schemeClr val="accent1"/>
-          </a:effectRef>
-          <a:fontRef idx="minor">
-            <a:schemeClr val="lt1"/>
-          </a:fontRef>
-        </p:style>
-        <p:txBody>
-          <a:bodyPr rtlCol="0" anchor="ctr"/>
-          <a:lstStyle/>
-          <a:p>
-            <a:pPr algn="ctr"/>
-          </a:p>
-        </p:txBody>
-      </p:sp>
-      <p:sp>
-        <p:nvSpPr>
-          <p:cNvPr id="31" name="Ag reflector + MLA film / Parylene-C [3000] label"/>
+          <p:cNvPr id="41" name="Ag reflector + MLA film / Parylene-C [3000] label"/>
           <p:cNvSpPr txBox="1"/>
           <p:nvPr/>
         </p:nvSpPr>
@@ -5308,7 +5978,208 @@
       </p:sp>
       <p:sp>
         <p:nvSpPr>
-          <p:cNvPr id="32" name="Ag reflector + MLA film / MoOx [5] + Ag reflector [100] front"/>
+          <p:cNvPr id="42" name="Ag reflector + MLA film / MoOx [5] + Ag reflector [100] left"/>
+          <p:cNvSpPr/>
+          <p:nvPr/>
+        </p:nvSpPr>
+        <p:spPr>
+          <a:xfrm>
+            <a:off x="1197399" y="1424447"/>
+            <a:ext cx="195938" cy="470251"/>
+          </a:xfrm>
+          <a:custGeom>
+            <a:avLst/>
+            <a:gdLst/>
+            <a:ahLst/>
+            <a:cxnLst/>
+            <a:rect l="l" t="t" r="r" b="b"/>
+            <a:pathLst>
+              <a:path w="195938" h="470251">
+                <a:moveTo>
+                  <a:pt x="195938" y="470251"/>
+                </a:moveTo>
+                <a:lnTo>
+                  <a:pt x="0" y="296084"/>
+                </a:lnTo>
+                <a:lnTo>
+                  <a:pt x="0" y="0"/>
+                </a:lnTo>
+                <a:lnTo>
+                  <a:pt x="195938" y="174167"/>
+                </a:lnTo>
+                <a:close/>
+              </a:path>
+            </a:pathLst>
+          </a:custGeom>
+          <a:solidFill>
+            <a:srgbClr val="81878D"/>
+          </a:solidFill>
+          <a:ln w="9525">
+            <a:solidFill>
+              <a:srgbClr val="5D666F"/>
+            </a:solidFill>
+          </a:ln>
+          <a:effectLst/>
+        </p:spPr>
+        <p:style>
+          <a:lnRef idx="1">
+            <a:schemeClr val="accent1"/>
+          </a:lnRef>
+          <a:fillRef idx="3">
+            <a:schemeClr val="accent1"/>
+          </a:fillRef>
+          <a:effectRef idx="2">
+            <a:schemeClr val="accent1"/>
+          </a:effectRef>
+          <a:fontRef idx="minor">
+            <a:schemeClr val="lt1"/>
+          </a:fontRef>
+        </p:style>
+        <p:txBody>
+          <a:bodyPr rtlCol="0" anchor="ctr"/>
+          <a:lstStyle/>
+          <a:p>
+            <a:pPr algn="ctr"/>
+          </a:p>
+        </p:txBody>
+      </p:sp>
+      <p:sp>
+        <p:nvSpPr>
+          <p:cNvPr id="43" name="Ag reflector + MLA film / MoOx [5] + Ag reflector [100] right"/>
+          <p:cNvSpPr/>
+          <p:nvPr/>
+        </p:nvSpPr>
+        <p:spPr>
+          <a:xfrm>
+            <a:off x="4005843" y="1424447"/>
+            <a:ext cx="195938" cy="470251"/>
+          </a:xfrm>
+          <a:custGeom>
+            <a:avLst/>
+            <a:gdLst/>
+            <a:ahLst/>
+            <a:cxnLst/>
+            <a:rect l="l" t="t" r="r" b="b"/>
+            <a:pathLst>
+              <a:path w="195938" h="470251">
+                <a:moveTo>
+                  <a:pt x="0" y="470251"/>
+                </a:moveTo>
+                <a:lnTo>
+                  <a:pt x="195938" y="296084"/>
+                </a:lnTo>
+                <a:lnTo>
+                  <a:pt x="195938" y="0"/>
+                </a:lnTo>
+                <a:lnTo>
+                  <a:pt x="0" y="174167"/>
+                </a:lnTo>
+                <a:close/>
+              </a:path>
+            </a:pathLst>
+          </a:custGeom>
+          <a:solidFill>
+            <a:srgbClr val="81878D"/>
+          </a:solidFill>
+          <a:ln w="9525">
+            <a:solidFill>
+              <a:srgbClr val="5D666F"/>
+            </a:solidFill>
+          </a:ln>
+          <a:effectLst/>
+        </p:spPr>
+        <p:style>
+          <a:lnRef idx="1">
+            <a:schemeClr val="accent1"/>
+          </a:lnRef>
+          <a:fillRef idx="3">
+            <a:schemeClr val="accent1"/>
+          </a:fillRef>
+          <a:effectRef idx="2">
+            <a:schemeClr val="accent1"/>
+          </a:effectRef>
+          <a:fontRef idx="minor">
+            <a:schemeClr val="lt1"/>
+          </a:fontRef>
+        </p:style>
+        <p:txBody>
+          <a:bodyPr rtlCol="0" anchor="ctr"/>
+          <a:lstStyle/>
+          <a:p>
+            <a:pPr algn="ctr"/>
+          </a:p>
+        </p:txBody>
+      </p:sp>
+      <p:sp>
+        <p:nvSpPr>
+          <p:cNvPr id="44" name="Ag reflector + MLA film / MoOx [5] + Ag reflector [100] top"/>
+          <p:cNvSpPr/>
+          <p:nvPr/>
+        </p:nvSpPr>
+        <p:spPr>
+          <a:xfrm>
+            <a:off x="1197399" y="1424447"/>
+            <a:ext cx="3004382" cy="174167"/>
+          </a:xfrm>
+          <a:custGeom>
+            <a:avLst/>
+            <a:gdLst/>
+            <a:ahLst/>
+            <a:cxnLst/>
+            <a:rect l="l" t="t" r="r" b="b"/>
+            <a:pathLst>
+              <a:path w="3004382" h="174167">
+                <a:moveTo>
+                  <a:pt x="195938" y="174167"/>
+                </a:moveTo>
+                <a:lnTo>
+                  <a:pt x="2808444" y="174167"/>
+                </a:lnTo>
+                <a:lnTo>
+                  <a:pt x="3004382" y="0"/>
+                </a:lnTo>
+                <a:lnTo>
+                  <a:pt x="0" y="0"/>
+                </a:lnTo>
+                <a:close/>
+              </a:path>
+            </a:pathLst>
+          </a:custGeom>
+          <a:solidFill>
+            <a:srgbClr val="A9B1B9"/>
+          </a:solidFill>
+          <a:ln w="9525">
+            <a:solidFill>
+              <a:srgbClr val="5D666F"/>
+            </a:solidFill>
+          </a:ln>
+          <a:effectLst/>
+        </p:spPr>
+        <p:style>
+          <a:lnRef idx="1">
+            <a:schemeClr val="accent1"/>
+          </a:lnRef>
+          <a:fillRef idx="3">
+            <a:schemeClr val="accent1"/>
+          </a:fillRef>
+          <a:effectRef idx="2">
+            <a:schemeClr val="accent1"/>
+          </a:effectRef>
+          <a:fontRef idx="minor">
+            <a:schemeClr val="lt1"/>
+          </a:fontRef>
+        </p:style>
+        <p:txBody>
+          <a:bodyPr rtlCol="0" anchor="ctr"/>
+          <a:lstStyle/>
+          <a:p>
+            <a:pPr algn="ctr"/>
+          </a:p>
+        </p:txBody>
+      </p:sp>
+      <p:sp>
+        <p:nvSpPr>
+          <p:cNvPr id="45" name="Ag reflector + MLA film / MoOx [5] + Ag reflector [100] front"/>
           <p:cNvSpPr/>
           <p:nvPr/>
         </p:nvSpPr>
@@ -5375,141 +6246,7 @@
       </p:sp>
       <p:sp>
         <p:nvSpPr>
-          <p:cNvPr id="33" name="Ag reflector + MLA film / MoOx [5] + Ag reflector [100] side"/>
-          <p:cNvSpPr/>
-          <p:nvPr/>
-        </p:nvSpPr>
-        <p:spPr>
-          <a:xfrm>
-            <a:off x="4005843" y="1424447"/>
-            <a:ext cx="278667" cy="470251"/>
-          </a:xfrm>
-          <a:custGeom>
-            <a:avLst/>
-            <a:gdLst/>
-            <a:ahLst/>
-            <a:cxnLst/>
-            <a:rect l="l" t="t" r="r" b="b"/>
-            <a:pathLst>
-              <a:path w="278667" h="470251">
-                <a:moveTo>
-                  <a:pt x="0" y="470251"/>
-                </a:moveTo>
-                <a:lnTo>
-                  <a:pt x="278667" y="296084"/>
-                </a:lnTo>
-                <a:lnTo>
-                  <a:pt x="278667" y="0"/>
-                </a:lnTo>
-                <a:lnTo>
-                  <a:pt x="0" y="174167"/>
-                </a:lnTo>
-                <a:close/>
-              </a:path>
-            </a:pathLst>
-          </a:custGeom>
-          <a:solidFill>
-            <a:srgbClr val="787E83"/>
-          </a:solidFill>
-          <a:ln w="9525">
-            <a:solidFill>
-              <a:srgbClr val="5D666F"/>
-            </a:solidFill>
-          </a:ln>
-          <a:effectLst/>
-        </p:spPr>
-        <p:style>
-          <a:lnRef idx="1">
-            <a:schemeClr val="accent1"/>
-          </a:lnRef>
-          <a:fillRef idx="3">
-            <a:schemeClr val="accent1"/>
-          </a:fillRef>
-          <a:effectRef idx="2">
-            <a:schemeClr val="accent1"/>
-          </a:effectRef>
-          <a:fontRef idx="minor">
-            <a:schemeClr val="lt1"/>
-          </a:fontRef>
-        </p:style>
-        <p:txBody>
-          <a:bodyPr rtlCol="0" anchor="ctr"/>
-          <a:lstStyle/>
-          <a:p>
-            <a:pPr algn="ctr"/>
-          </a:p>
-        </p:txBody>
-      </p:sp>
-      <p:sp>
-        <p:nvSpPr>
-          <p:cNvPr id="34" name="Ag reflector + MLA film / MoOx [5] + Ag reflector [100] top"/>
-          <p:cNvSpPr/>
-          <p:nvPr/>
-        </p:nvSpPr>
-        <p:spPr>
-          <a:xfrm>
-            <a:off x="1393337" y="1424447"/>
-            <a:ext cx="2891173" cy="174167"/>
-          </a:xfrm>
-          <a:custGeom>
-            <a:avLst/>
-            <a:gdLst/>
-            <a:ahLst/>
-            <a:cxnLst/>
-            <a:rect l="l" t="t" r="r" b="b"/>
-            <a:pathLst>
-              <a:path w="2891173" h="174167">
-                <a:moveTo>
-                  <a:pt x="0" y="174167"/>
-                </a:moveTo>
-                <a:lnTo>
-                  <a:pt x="2612506" y="174167"/>
-                </a:lnTo>
-                <a:lnTo>
-                  <a:pt x="2891173" y="0"/>
-                </a:lnTo>
-                <a:lnTo>
-                  <a:pt x="278667" y="0"/>
-                </a:lnTo>
-                <a:close/>
-              </a:path>
-            </a:pathLst>
-          </a:custGeom>
-          <a:solidFill>
-            <a:srgbClr val="A9B1B9"/>
-          </a:solidFill>
-          <a:ln w="9525">
-            <a:solidFill>
-              <a:srgbClr val="5D666F"/>
-            </a:solidFill>
-          </a:ln>
-          <a:effectLst/>
-        </p:spPr>
-        <p:style>
-          <a:lnRef idx="1">
-            <a:schemeClr val="accent1"/>
-          </a:lnRef>
-          <a:fillRef idx="3">
-            <a:schemeClr val="accent1"/>
-          </a:fillRef>
-          <a:effectRef idx="2">
-            <a:schemeClr val="accent1"/>
-          </a:effectRef>
-          <a:fontRef idx="minor">
-            <a:schemeClr val="lt1"/>
-          </a:fontRef>
-        </p:style>
-        <p:txBody>
-          <a:bodyPr rtlCol="0" anchor="ctr"/>
-          <a:lstStyle/>
-          <a:p>
-            <a:pPr algn="ctr"/>
-          </a:p>
-        </p:txBody>
-      </p:sp>
-      <p:sp>
-        <p:nvSpPr>
-          <p:cNvPr id="35" name="Ag reflector + MLA film / MoOx [5] + Ag reflector [100] label"/>
+          <p:cNvPr id="46" name="Ag reflector + MLA film / MoOx [5] + Ag reflector [100] label"/>
           <p:cNvSpPr txBox="1"/>
           <p:nvPr/>
         </p:nvSpPr>
@@ -5544,13 +6281,13 @@
       </p:sp>
       <p:sp>
         <p:nvSpPr>
-          <p:cNvPr id="36" name="Ag reflector + MLA film title"/>
+          <p:cNvPr id="47" name="Ag reflector + MLA film title"/>
           <p:cNvSpPr txBox="1"/>
           <p:nvPr/>
         </p:nvSpPr>
         <p:spPr>
           <a:xfrm>
-            <a:off x="574751" y="669432"/>
+            <a:off x="435418" y="669432"/>
             <a:ext cx="4528344" cy="430193"/>
           </a:xfrm>
           <a:prstGeom prst="rect">
@@ -5579,7 +6316,7 @@
       </p:sp>
       <p:cxnSp>
         <p:nvCxnSpPr>
-          <p:cNvPr id="37" name="bottom emission"/>
+          <p:cNvPr id="48" name="bottom emission"/>
           <p:cNvCxnSpPr/>
           <p:nvPr/>
         </p:nvCxnSpPr>
@@ -5616,7 +6353,7 @@
       </p:cxnSp>
       <p:cxnSp>
         <p:nvCxnSpPr>
-          <p:cNvPr id="38" name="bottom emission"/>
+          <p:cNvPr id="49" name="bottom emission"/>
           <p:cNvCxnSpPr/>
           <p:nvPr/>
         </p:nvCxnSpPr>
@@ -5653,7 +6390,7 @@
       </p:cxnSp>
       <p:cxnSp>
         <p:nvCxnSpPr>
-          <p:cNvPr id="39" name="bottom emission"/>
+          <p:cNvPr id="50" name="bottom emission"/>
           <p:cNvCxnSpPr/>
           <p:nvPr/>
         </p:nvCxnSpPr>
@@ -5690,7 +6427,7 @@
       </p:cxnSp>
       <p:sp>
         <p:nvSpPr>
-          <p:cNvPr id="40" name="emission label"/>
+          <p:cNvPr id="51" name="emission label"/>
           <p:cNvSpPr txBox="1"/>
           <p:nvPr/>
         </p:nvSpPr>
@@ -5725,7 +6462,141 @@
       </p:sp>
       <p:sp>
         <p:nvSpPr>
-          <p:cNvPr id="41" name="DBR + MLA substrate / MLA substrate (n = 1.77) front"/>
+          <p:cNvPr id="52" name="DBR + MLA substrate / MLA substrate (n = 1.77) left"/>
+          <p:cNvSpPr/>
+          <p:nvPr/>
+        </p:nvSpPr>
+        <p:spPr>
+          <a:xfrm>
+            <a:off x="6683661" y="4367870"/>
+            <a:ext cx="195938" cy="574751"/>
+          </a:xfrm>
+          <a:custGeom>
+            <a:avLst/>
+            <a:gdLst/>
+            <a:ahLst/>
+            <a:cxnLst/>
+            <a:rect l="l" t="t" r="r" b="b"/>
+            <a:pathLst>
+              <a:path w="195938" h="574751">
+                <a:moveTo>
+                  <a:pt x="195938" y="574751"/>
+                </a:moveTo>
+                <a:lnTo>
+                  <a:pt x="0" y="400584"/>
+                </a:lnTo>
+                <a:lnTo>
+                  <a:pt x="0" y="0"/>
+                </a:lnTo>
+                <a:lnTo>
+                  <a:pt x="195938" y="174167"/>
+                </a:lnTo>
+                <a:close/>
+              </a:path>
+            </a:pathLst>
+          </a:custGeom>
+          <a:solidFill>
+            <a:srgbClr val="AEC0CE"/>
+          </a:solidFill>
+          <a:ln w="9525">
+            <a:solidFill>
+              <a:srgbClr val="5D666F"/>
+            </a:solidFill>
+          </a:ln>
+          <a:effectLst/>
+        </p:spPr>
+        <p:style>
+          <a:lnRef idx="1">
+            <a:schemeClr val="accent1"/>
+          </a:lnRef>
+          <a:fillRef idx="3">
+            <a:schemeClr val="accent1"/>
+          </a:fillRef>
+          <a:effectRef idx="2">
+            <a:schemeClr val="accent1"/>
+          </a:effectRef>
+          <a:fontRef idx="minor">
+            <a:schemeClr val="lt1"/>
+          </a:fontRef>
+        </p:style>
+        <p:txBody>
+          <a:bodyPr rtlCol="0" anchor="ctr"/>
+          <a:lstStyle/>
+          <a:p>
+            <a:pPr algn="ctr"/>
+          </a:p>
+        </p:txBody>
+      </p:sp>
+      <p:sp>
+        <p:nvSpPr>
+          <p:cNvPr id="53" name="DBR + MLA substrate / MLA substrate (n = 1.77) right"/>
+          <p:cNvSpPr/>
+          <p:nvPr/>
+        </p:nvSpPr>
+        <p:spPr>
+          <a:xfrm>
+            <a:off x="9492105" y="4367870"/>
+            <a:ext cx="195938" cy="574751"/>
+          </a:xfrm>
+          <a:custGeom>
+            <a:avLst/>
+            <a:gdLst/>
+            <a:ahLst/>
+            <a:cxnLst/>
+            <a:rect l="l" t="t" r="r" b="b"/>
+            <a:pathLst>
+              <a:path w="195938" h="574751">
+                <a:moveTo>
+                  <a:pt x="0" y="574751"/>
+                </a:moveTo>
+                <a:lnTo>
+                  <a:pt x="195938" y="400584"/>
+                </a:lnTo>
+                <a:lnTo>
+                  <a:pt x="195938" y="0"/>
+                </a:lnTo>
+                <a:lnTo>
+                  <a:pt x="0" y="174167"/>
+                </a:lnTo>
+                <a:close/>
+              </a:path>
+            </a:pathLst>
+          </a:custGeom>
+          <a:solidFill>
+            <a:srgbClr val="AEC0CE"/>
+          </a:solidFill>
+          <a:ln w="9525">
+            <a:solidFill>
+              <a:srgbClr val="5D666F"/>
+            </a:solidFill>
+          </a:ln>
+          <a:effectLst/>
+        </p:spPr>
+        <p:style>
+          <a:lnRef idx="1">
+            <a:schemeClr val="accent1"/>
+          </a:lnRef>
+          <a:fillRef idx="3">
+            <a:schemeClr val="accent1"/>
+          </a:fillRef>
+          <a:effectRef idx="2">
+            <a:schemeClr val="accent1"/>
+          </a:effectRef>
+          <a:fontRef idx="minor">
+            <a:schemeClr val="lt1"/>
+          </a:fontRef>
+        </p:style>
+        <p:txBody>
+          <a:bodyPr rtlCol="0" anchor="ctr"/>
+          <a:lstStyle/>
+          <a:p>
+            <a:pPr algn="ctr"/>
+          </a:p>
+        </p:txBody>
+      </p:sp>
+      <p:sp>
+        <p:nvSpPr>
+          <p:cNvPr id="54" name="DBR + MLA substrate / MLA substrate (n = 1.77) front"/>
           <p:cNvSpPr/>
           <p:nvPr/>
         </p:nvSpPr>
@@ -6266,74 +7137,7 @@
       </p:sp>
       <p:sp>
         <p:nvSpPr>
-          <p:cNvPr id="42" name="DBR + MLA substrate / MLA substrate (n = 1.77) side"/>
-          <p:cNvSpPr/>
-          <p:nvPr/>
-        </p:nvSpPr>
-        <p:spPr>
-          <a:xfrm>
-            <a:off x="9492105" y="4367870"/>
-            <a:ext cx="278668" cy="574751"/>
-          </a:xfrm>
-          <a:custGeom>
-            <a:avLst/>
-            <a:gdLst/>
-            <a:ahLst/>
-            <a:cxnLst/>
-            <a:rect l="l" t="t" r="r" b="b"/>
-            <a:pathLst>
-              <a:path w="278668" h="574751">
-                <a:moveTo>
-                  <a:pt x="0" y="574751"/>
-                </a:moveTo>
-                <a:lnTo>
-                  <a:pt x="278668" y="400584"/>
-                </a:lnTo>
-                <a:lnTo>
-                  <a:pt x="278668" y="0"/>
-                </a:lnTo>
-                <a:lnTo>
-                  <a:pt x="0" y="174167"/>
-                </a:lnTo>
-                <a:close/>
-              </a:path>
-            </a:pathLst>
-          </a:custGeom>
-          <a:solidFill>
-            <a:srgbClr val="A1B2BF"/>
-          </a:solidFill>
-          <a:ln w="9525">
-            <a:solidFill>
-              <a:srgbClr val="5D666F"/>
-            </a:solidFill>
-          </a:ln>
-          <a:effectLst/>
-        </p:spPr>
-        <p:style>
-          <a:lnRef idx="1">
-            <a:schemeClr val="accent1"/>
-          </a:lnRef>
-          <a:fillRef idx="3">
-            <a:schemeClr val="accent1"/>
-          </a:fillRef>
-          <a:effectRef idx="2">
-            <a:schemeClr val="accent1"/>
-          </a:effectRef>
-          <a:fontRef idx="minor">
-            <a:schemeClr val="lt1"/>
-          </a:fontRef>
-        </p:style>
-        <p:txBody>
-          <a:bodyPr rtlCol="0" anchor="ctr"/>
-          <a:lstStyle/>
-          <a:p>
-            <a:pPr algn="ctr"/>
-          </a:p>
-        </p:txBody>
-      </p:sp>
-      <p:sp>
-        <p:nvSpPr>
-          <p:cNvPr id="43" name="DBR + MLA substrate / MLA substrate (n = 1.77) label"/>
+          <p:cNvPr id="55" name="DBR + MLA substrate / MLA substrate (n = 1.77) label"/>
           <p:cNvSpPr txBox="1"/>
           <p:nvPr/>
         </p:nvSpPr>
@@ -6368,7 +7172,141 @@
       </p:sp>
       <p:sp>
         <p:nvSpPr>
-          <p:cNvPr id="44" name="DBR + MLA substrate / IZO front"/>
+          <p:cNvPr id="56" name="DBR + MLA substrate / IZO left"/>
+          <p:cNvSpPr/>
+          <p:nvPr/>
+        </p:nvSpPr>
+        <p:spPr>
+          <a:xfrm>
+            <a:off x="6683661" y="4080494"/>
+            <a:ext cx="195938" cy="461543"/>
+          </a:xfrm>
+          <a:custGeom>
+            <a:avLst/>
+            <a:gdLst/>
+            <a:ahLst/>
+            <a:cxnLst/>
+            <a:rect l="l" t="t" r="r" b="b"/>
+            <a:pathLst>
+              <a:path w="195938" h="461543">
+                <a:moveTo>
+                  <a:pt x="195938" y="461543"/>
+                </a:moveTo>
+                <a:lnTo>
+                  <a:pt x="0" y="287376"/>
+                </a:lnTo>
+                <a:lnTo>
+                  <a:pt x="0" y="0"/>
+                </a:lnTo>
+                <a:lnTo>
+                  <a:pt x="195938" y="174167"/>
+                </a:lnTo>
+                <a:close/>
+              </a:path>
+            </a:pathLst>
+          </a:custGeom>
+          <a:solidFill>
+            <a:srgbClr val="6BB1C3"/>
+          </a:solidFill>
+          <a:ln w="9525">
+            <a:solidFill>
+              <a:srgbClr val="5D666F"/>
+            </a:solidFill>
+          </a:ln>
+          <a:effectLst/>
+        </p:spPr>
+        <p:style>
+          <a:lnRef idx="1">
+            <a:schemeClr val="accent1"/>
+          </a:lnRef>
+          <a:fillRef idx="3">
+            <a:schemeClr val="accent1"/>
+          </a:fillRef>
+          <a:effectRef idx="2">
+            <a:schemeClr val="accent1"/>
+          </a:effectRef>
+          <a:fontRef idx="minor">
+            <a:schemeClr val="lt1"/>
+          </a:fontRef>
+        </p:style>
+        <p:txBody>
+          <a:bodyPr rtlCol="0" anchor="ctr"/>
+          <a:lstStyle/>
+          <a:p>
+            <a:pPr algn="ctr"/>
+          </a:p>
+        </p:txBody>
+      </p:sp>
+      <p:sp>
+        <p:nvSpPr>
+          <p:cNvPr id="57" name="DBR + MLA substrate / IZO right"/>
+          <p:cNvSpPr/>
+          <p:nvPr/>
+        </p:nvSpPr>
+        <p:spPr>
+          <a:xfrm>
+            <a:off x="9492105" y="4080494"/>
+            <a:ext cx="195938" cy="461543"/>
+          </a:xfrm>
+          <a:custGeom>
+            <a:avLst/>
+            <a:gdLst/>
+            <a:ahLst/>
+            <a:cxnLst/>
+            <a:rect l="l" t="t" r="r" b="b"/>
+            <a:pathLst>
+              <a:path w="195938" h="461543">
+                <a:moveTo>
+                  <a:pt x="0" y="461543"/>
+                </a:moveTo>
+                <a:lnTo>
+                  <a:pt x="195938" y="287376"/>
+                </a:lnTo>
+                <a:lnTo>
+                  <a:pt x="195938" y="0"/>
+                </a:lnTo>
+                <a:lnTo>
+                  <a:pt x="0" y="174167"/>
+                </a:lnTo>
+                <a:close/>
+              </a:path>
+            </a:pathLst>
+          </a:custGeom>
+          <a:solidFill>
+            <a:srgbClr val="6BB1C3"/>
+          </a:solidFill>
+          <a:ln w="9525">
+            <a:solidFill>
+              <a:srgbClr val="5D666F"/>
+            </a:solidFill>
+          </a:ln>
+          <a:effectLst/>
+        </p:spPr>
+        <p:style>
+          <a:lnRef idx="1">
+            <a:schemeClr val="accent1"/>
+          </a:lnRef>
+          <a:fillRef idx="3">
+            <a:schemeClr val="accent1"/>
+          </a:fillRef>
+          <a:effectRef idx="2">
+            <a:schemeClr val="accent1"/>
+          </a:effectRef>
+          <a:fontRef idx="minor">
+            <a:schemeClr val="lt1"/>
+          </a:fontRef>
+        </p:style>
+        <p:txBody>
+          <a:bodyPr rtlCol="0" anchor="ctr"/>
+          <a:lstStyle/>
+          <a:p>
+            <a:pPr algn="ctr"/>
+          </a:p>
+        </p:txBody>
+      </p:sp>
+      <p:sp>
+        <p:nvSpPr>
+          <p:cNvPr id="58" name="DBR + MLA substrate / IZO front"/>
           <p:cNvSpPr/>
           <p:nvPr/>
         </p:nvSpPr>
@@ -6435,74 +7373,7 @@
       </p:sp>
       <p:sp>
         <p:nvSpPr>
-          <p:cNvPr id="45" name="DBR + MLA substrate / IZO side"/>
-          <p:cNvSpPr/>
-          <p:nvPr/>
-        </p:nvSpPr>
-        <p:spPr>
-          <a:xfrm>
-            <a:off x="9492105" y="4080494"/>
-            <a:ext cx="278668" cy="461543"/>
-          </a:xfrm>
-          <a:custGeom>
-            <a:avLst/>
-            <a:gdLst/>
-            <a:ahLst/>
-            <a:cxnLst/>
-            <a:rect l="l" t="t" r="r" b="b"/>
-            <a:pathLst>
-              <a:path w="278668" h="461543">
-                <a:moveTo>
-                  <a:pt x="0" y="461543"/>
-                </a:moveTo>
-                <a:lnTo>
-                  <a:pt x="278668" y="287376"/>
-                </a:lnTo>
-                <a:lnTo>
-                  <a:pt x="278668" y="0"/>
-                </a:lnTo>
-                <a:lnTo>
-                  <a:pt x="0" y="174167"/>
-                </a:lnTo>
-                <a:close/>
-              </a:path>
-            </a:pathLst>
-          </a:custGeom>
-          <a:solidFill>
-            <a:srgbClr val="63A5B5"/>
-          </a:solidFill>
-          <a:ln w="9525">
-            <a:solidFill>
-              <a:srgbClr val="5D666F"/>
-            </a:solidFill>
-          </a:ln>
-          <a:effectLst/>
-        </p:spPr>
-        <p:style>
-          <a:lnRef idx="1">
-            <a:schemeClr val="accent1"/>
-          </a:lnRef>
-          <a:fillRef idx="3">
-            <a:schemeClr val="accent1"/>
-          </a:fillRef>
-          <a:effectRef idx="2">
-            <a:schemeClr val="accent1"/>
-          </a:effectRef>
-          <a:fontRef idx="minor">
-            <a:schemeClr val="lt1"/>
-          </a:fontRef>
-        </p:style>
-        <p:txBody>
-          <a:bodyPr rtlCol="0" anchor="ctr"/>
-          <a:lstStyle/>
-          <a:p>
-            <a:pPr algn="ctr"/>
-          </a:p>
-        </p:txBody>
-      </p:sp>
-      <p:sp>
-        <p:nvSpPr>
-          <p:cNvPr id="46" name="DBR + MLA substrate / IZO label"/>
+          <p:cNvPr id="59" name="DBR + MLA substrate / IZO label"/>
           <p:cNvSpPr txBox="1"/>
           <p:nvPr/>
         </p:nvSpPr>
@@ -6537,7 +7408,141 @@
       </p:sp>
       <p:sp>
         <p:nvSpPr>
-          <p:cNvPr id="47" name="DBR + MLA substrate / TAPC/HAT-CN/TAPC/HAT-CN front"/>
+          <p:cNvPr id="60" name="DBR + MLA substrate / TAPC/HAT-CN/TAPC/HAT-CN left"/>
+          <p:cNvSpPr/>
+          <p:nvPr/>
+        </p:nvSpPr>
+        <p:spPr>
+          <a:xfrm>
+            <a:off x="6683661" y="3793119"/>
+            <a:ext cx="195938" cy="461542"/>
+          </a:xfrm>
+          <a:custGeom>
+            <a:avLst/>
+            <a:gdLst/>
+            <a:ahLst/>
+            <a:cxnLst/>
+            <a:rect l="l" t="t" r="r" b="b"/>
+            <a:pathLst>
+              <a:path w="195938" h="461542">
+                <a:moveTo>
+                  <a:pt x="195938" y="461542"/>
+                </a:moveTo>
+                <a:lnTo>
+                  <a:pt x="0" y="287375"/>
+                </a:lnTo>
+                <a:lnTo>
+                  <a:pt x="0" y="0"/>
+                </a:lnTo>
+                <a:lnTo>
+                  <a:pt x="195938" y="174167"/>
+                </a:lnTo>
+                <a:close/>
+              </a:path>
+            </a:pathLst>
+          </a:custGeom>
+          <a:solidFill>
+            <a:srgbClr val="CFBB92"/>
+          </a:solidFill>
+          <a:ln w="9525">
+            <a:solidFill>
+              <a:srgbClr val="5D666F"/>
+            </a:solidFill>
+          </a:ln>
+          <a:effectLst/>
+        </p:spPr>
+        <p:style>
+          <a:lnRef idx="1">
+            <a:schemeClr val="accent1"/>
+          </a:lnRef>
+          <a:fillRef idx="3">
+            <a:schemeClr val="accent1"/>
+          </a:fillRef>
+          <a:effectRef idx="2">
+            <a:schemeClr val="accent1"/>
+          </a:effectRef>
+          <a:fontRef idx="minor">
+            <a:schemeClr val="lt1"/>
+          </a:fontRef>
+        </p:style>
+        <p:txBody>
+          <a:bodyPr rtlCol="0" anchor="ctr"/>
+          <a:lstStyle/>
+          <a:p>
+            <a:pPr algn="ctr"/>
+          </a:p>
+        </p:txBody>
+      </p:sp>
+      <p:sp>
+        <p:nvSpPr>
+          <p:cNvPr id="61" name="DBR + MLA substrate / TAPC/HAT-CN/TAPC/HAT-CN right"/>
+          <p:cNvSpPr/>
+          <p:nvPr/>
+        </p:nvSpPr>
+        <p:spPr>
+          <a:xfrm>
+            <a:off x="9492105" y="3793119"/>
+            <a:ext cx="195938" cy="461542"/>
+          </a:xfrm>
+          <a:custGeom>
+            <a:avLst/>
+            <a:gdLst/>
+            <a:ahLst/>
+            <a:cxnLst/>
+            <a:rect l="l" t="t" r="r" b="b"/>
+            <a:pathLst>
+              <a:path w="195938" h="461542">
+                <a:moveTo>
+                  <a:pt x="0" y="461542"/>
+                </a:moveTo>
+                <a:lnTo>
+                  <a:pt x="195938" y="287375"/>
+                </a:lnTo>
+                <a:lnTo>
+                  <a:pt x="195938" y="0"/>
+                </a:lnTo>
+                <a:lnTo>
+                  <a:pt x="0" y="174167"/>
+                </a:lnTo>
+                <a:close/>
+              </a:path>
+            </a:pathLst>
+          </a:custGeom>
+          <a:solidFill>
+            <a:srgbClr val="CFBB92"/>
+          </a:solidFill>
+          <a:ln w="9525">
+            <a:solidFill>
+              <a:srgbClr val="5D666F"/>
+            </a:solidFill>
+          </a:ln>
+          <a:effectLst/>
+        </p:spPr>
+        <p:style>
+          <a:lnRef idx="1">
+            <a:schemeClr val="accent1"/>
+          </a:lnRef>
+          <a:fillRef idx="3">
+            <a:schemeClr val="accent1"/>
+          </a:fillRef>
+          <a:effectRef idx="2">
+            <a:schemeClr val="accent1"/>
+          </a:effectRef>
+          <a:fontRef idx="minor">
+            <a:schemeClr val="lt1"/>
+          </a:fontRef>
+        </p:style>
+        <p:txBody>
+          <a:bodyPr rtlCol="0" anchor="ctr"/>
+          <a:lstStyle/>
+          <a:p>
+            <a:pPr algn="ctr"/>
+          </a:p>
+        </p:txBody>
+      </p:sp>
+      <p:sp>
+        <p:nvSpPr>
+          <p:cNvPr id="62" name="DBR + MLA substrate / TAPC/HAT-CN/TAPC/HAT-CN front"/>
           <p:cNvSpPr/>
           <p:nvPr/>
         </p:nvSpPr>
@@ -6604,74 +7609,7 @@
       </p:sp>
       <p:sp>
         <p:nvSpPr>
-          <p:cNvPr id="48" name="DBR + MLA substrate / TAPC/HAT-CN/TAPC/HAT-CN side"/>
-          <p:cNvSpPr/>
-          <p:nvPr/>
-        </p:nvSpPr>
-        <p:spPr>
-          <a:xfrm>
-            <a:off x="9492105" y="3793119"/>
-            <a:ext cx="278668" cy="461542"/>
-          </a:xfrm>
-          <a:custGeom>
-            <a:avLst/>
-            <a:gdLst/>
-            <a:ahLst/>
-            <a:cxnLst/>
-            <a:rect l="l" t="t" r="r" b="b"/>
-            <a:pathLst>
-              <a:path w="278668" h="461542">
-                <a:moveTo>
-                  <a:pt x="0" y="461542"/>
-                </a:moveTo>
-                <a:lnTo>
-                  <a:pt x="278668" y="287375"/>
-                </a:lnTo>
-                <a:lnTo>
-                  <a:pt x="278668" y="0"/>
-                </a:lnTo>
-                <a:lnTo>
-                  <a:pt x="0" y="174167"/>
-                </a:lnTo>
-                <a:close/>
-              </a:path>
-            </a:pathLst>
-          </a:custGeom>
-          <a:solidFill>
-            <a:srgbClr val="C0AE88"/>
-          </a:solidFill>
-          <a:ln w="9525">
-            <a:solidFill>
-              <a:srgbClr val="5D666F"/>
-            </a:solidFill>
-          </a:ln>
-          <a:effectLst/>
-        </p:spPr>
-        <p:style>
-          <a:lnRef idx="1">
-            <a:schemeClr val="accent1"/>
-          </a:lnRef>
-          <a:fillRef idx="3">
-            <a:schemeClr val="accent1"/>
-          </a:fillRef>
-          <a:effectRef idx="2">
-            <a:schemeClr val="accent1"/>
-          </a:effectRef>
-          <a:fontRef idx="minor">
-            <a:schemeClr val="lt1"/>
-          </a:fontRef>
-        </p:style>
-        <p:txBody>
-          <a:bodyPr rtlCol="0" anchor="ctr"/>
-          <a:lstStyle/>
-          <a:p>
-            <a:pPr algn="ctr"/>
-          </a:p>
-        </p:txBody>
-      </p:sp>
-      <p:sp>
-        <p:nvSpPr>
-          <p:cNvPr id="49" name="DBR + MLA substrate / TAPC/HAT-CN/TAPC/HAT-CN label"/>
+          <p:cNvPr id="63" name="DBR + MLA substrate / TAPC/HAT-CN/TAPC/HAT-CN label"/>
           <p:cNvSpPr txBox="1"/>
           <p:nvPr/>
         </p:nvSpPr>
@@ -6706,7 +7644,141 @@
       </p:sp>
       <p:sp>
         <p:nvSpPr>
-          <p:cNvPr id="50" name="DBR + MLA substrate / TCTA front"/>
+          <p:cNvPr id="64" name="DBR + MLA substrate / TCTA left"/>
+          <p:cNvSpPr/>
+          <p:nvPr/>
+        </p:nvSpPr>
+        <p:spPr>
+          <a:xfrm>
+            <a:off x="6683661" y="3514451"/>
+            <a:ext cx="195938" cy="452835"/>
+          </a:xfrm>
+          <a:custGeom>
+            <a:avLst/>
+            <a:gdLst/>
+            <a:ahLst/>
+            <a:cxnLst/>
+            <a:rect l="l" t="t" r="r" b="b"/>
+            <a:pathLst>
+              <a:path w="195938" h="452835">
+                <a:moveTo>
+                  <a:pt x="195938" y="452835"/>
+                </a:moveTo>
+                <a:lnTo>
+                  <a:pt x="0" y="278668"/>
+                </a:lnTo>
+                <a:lnTo>
+                  <a:pt x="0" y="0"/>
+                </a:lnTo>
+                <a:lnTo>
+                  <a:pt x="195938" y="174167"/>
+                </a:lnTo>
+                <a:close/>
+              </a:path>
+            </a:pathLst>
+          </a:custGeom>
+          <a:solidFill>
+            <a:srgbClr val="CA9B51"/>
+          </a:solidFill>
+          <a:ln w="9525">
+            <a:solidFill>
+              <a:srgbClr val="5D666F"/>
+            </a:solidFill>
+          </a:ln>
+          <a:effectLst/>
+        </p:spPr>
+        <p:style>
+          <a:lnRef idx="1">
+            <a:schemeClr val="accent1"/>
+          </a:lnRef>
+          <a:fillRef idx="3">
+            <a:schemeClr val="accent1"/>
+          </a:fillRef>
+          <a:effectRef idx="2">
+            <a:schemeClr val="accent1"/>
+          </a:effectRef>
+          <a:fontRef idx="minor">
+            <a:schemeClr val="lt1"/>
+          </a:fontRef>
+        </p:style>
+        <p:txBody>
+          <a:bodyPr rtlCol="0" anchor="ctr"/>
+          <a:lstStyle/>
+          <a:p>
+            <a:pPr algn="ctr"/>
+          </a:p>
+        </p:txBody>
+      </p:sp>
+      <p:sp>
+        <p:nvSpPr>
+          <p:cNvPr id="65" name="DBR + MLA substrate / TCTA right"/>
+          <p:cNvSpPr/>
+          <p:nvPr/>
+        </p:nvSpPr>
+        <p:spPr>
+          <a:xfrm>
+            <a:off x="9492105" y="3514451"/>
+            <a:ext cx="195938" cy="452835"/>
+          </a:xfrm>
+          <a:custGeom>
+            <a:avLst/>
+            <a:gdLst/>
+            <a:ahLst/>
+            <a:cxnLst/>
+            <a:rect l="l" t="t" r="r" b="b"/>
+            <a:pathLst>
+              <a:path w="195938" h="452835">
+                <a:moveTo>
+                  <a:pt x="0" y="452835"/>
+                </a:moveTo>
+                <a:lnTo>
+                  <a:pt x="195938" y="278668"/>
+                </a:lnTo>
+                <a:lnTo>
+                  <a:pt x="195938" y="0"/>
+                </a:lnTo>
+                <a:lnTo>
+                  <a:pt x="0" y="174167"/>
+                </a:lnTo>
+                <a:close/>
+              </a:path>
+            </a:pathLst>
+          </a:custGeom>
+          <a:solidFill>
+            <a:srgbClr val="CA9B51"/>
+          </a:solidFill>
+          <a:ln w="9525">
+            <a:solidFill>
+              <a:srgbClr val="5D666F"/>
+            </a:solidFill>
+          </a:ln>
+          <a:effectLst/>
+        </p:spPr>
+        <p:style>
+          <a:lnRef idx="1">
+            <a:schemeClr val="accent1"/>
+          </a:lnRef>
+          <a:fillRef idx="3">
+            <a:schemeClr val="accent1"/>
+          </a:fillRef>
+          <a:effectRef idx="2">
+            <a:schemeClr val="accent1"/>
+          </a:effectRef>
+          <a:fontRef idx="minor">
+            <a:schemeClr val="lt1"/>
+          </a:fontRef>
+        </p:style>
+        <p:txBody>
+          <a:bodyPr rtlCol="0" anchor="ctr"/>
+          <a:lstStyle/>
+          <a:p>
+            <a:pPr algn="ctr"/>
+          </a:p>
+        </p:txBody>
+      </p:sp>
+      <p:sp>
+        <p:nvSpPr>
+          <p:cNvPr id="66" name="DBR + MLA substrate / TCTA front"/>
           <p:cNvSpPr/>
           <p:nvPr/>
         </p:nvSpPr>
@@ -6773,74 +7845,7 @@
       </p:sp>
       <p:sp>
         <p:nvSpPr>
-          <p:cNvPr id="51" name="DBR + MLA substrate / TCTA side"/>
-          <p:cNvSpPr/>
-          <p:nvPr/>
-        </p:nvSpPr>
-        <p:spPr>
-          <a:xfrm>
-            <a:off x="9492105" y="3514451"/>
-            <a:ext cx="278668" cy="452835"/>
-          </a:xfrm>
-          <a:custGeom>
-            <a:avLst/>
-            <a:gdLst/>
-            <a:ahLst/>
-            <a:cxnLst/>
-            <a:rect l="l" t="t" r="r" b="b"/>
-            <a:pathLst>
-              <a:path w="278668" h="452835">
-                <a:moveTo>
-                  <a:pt x="0" y="452835"/>
-                </a:moveTo>
-                <a:lnTo>
-                  <a:pt x="278668" y="278668"/>
-                </a:lnTo>
-                <a:lnTo>
-                  <a:pt x="278668" y="0"/>
-                </a:lnTo>
-                <a:lnTo>
-                  <a:pt x="0" y="174167"/>
-                </a:lnTo>
-                <a:close/>
-              </a:path>
-            </a:pathLst>
-          </a:custGeom>
-          <a:solidFill>
-            <a:srgbClr val="BB904B"/>
-          </a:solidFill>
-          <a:ln w="9525">
-            <a:solidFill>
-              <a:srgbClr val="5D666F"/>
-            </a:solidFill>
-          </a:ln>
-          <a:effectLst/>
-        </p:spPr>
-        <p:style>
-          <a:lnRef idx="1">
-            <a:schemeClr val="accent1"/>
-          </a:lnRef>
-          <a:fillRef idx="3">
-            <a:schemeClr val="accent1"/>
-          </a:fillRef>
-          <a:effectRef idx="2">
-            <a:schemeClr val="accent1"/>
-          </a:effectRef>
-          <a:fontRef idx="minor">
-            <a:schemeClr val="lt1"/>
-          </a:fontRef>
-        </p:style>
-        <p:txBody>
-          <a:bodyPr rtlCol="0" anchor="ctr"/>
-          <a:lstStyle/>
-          <a:p>
-            <a:pPr algn="ctr"/>
-          </a:p>
-        </p:txBody>
-      </p:sp>
-      <p:sp>
-        <p:nvSpPr>
-          <p:cNvPr id="52" name="DBR + MLA substrate / TCTA label"/>
+          <p:cNvPr id="67" name="DBR + MLA substrate / TCTA label"/>
           <p:cNvSpPr txBox="1"/>
           <p:nvPr/>
         </p:nvSpPr>
@@ -6875,7 +7880,141 @@
       </p:sp>
       <p:sp>
         <p:nvSpPr>
-          <p:cNvPr id="53" name="DBR + MLA substrate / TCTA:B3PyMPM:Ir(dmppy-ph)₂tmd front"/>
+          <p:cNvPr id="68" name="DBR + MLA substrate / TCTA:B3PyMPM:Ir(dmppy-ph)₂tmd left"/>
+          <p:cNvSpPr/>
+          <p:nvPr/>
+        </p:nvSpPr>
+        <p:spPr>
+          <a:xfrm>
+            <a:off x="6683661" y="3200951"/>
+            <a:ext cx="195938" cy="487667"/>
+          </a:xfrm>
+          <a:custGeom>
+            <a:avLst/>
+            <a:gdLst/>
+            <a:ahLst/>
+            <a:cxnLst/>
+            <a:rect l="l" t="t" r="r" b="b"/>
+            <a:pathLst>
+              <a:path w="195938" h="487667">
+                <a:moveTo>
+                  <a:pt x="195938" y="487667"/>
+                </a:moveTo>
+                <a:lnTo>
+                  <a:pt x="0" y="313500"/>
+                </a:lnTo>
+                <a:lnTo>
+                  <a:pt x="0" y="0"/>
+                </a:lnTo>
+                <a:lnTo>
+                  <a:pt x="195938" y="174167"/>
+                </a:lnTo>
+                <a:close/>
+              </a:path>
+            </a:pathLst>
+          </a:custGeom>
+          <a:solidFill>
+            <a:srgbClr val="963131"/>
+          </a:solidFill>
+          <a:ln w="9525">
+            <a:solidFill>
+              <a:srgbClr val="5D666F"/>
+            </a:solidFill>
+          </a:ln>
+          <a:effectLst/>
+        </p:spPr>
+        <p:style>
+          <a:lnRef idx="1">
+            <a:schemeClr val="accent1"/>
+          </a:lnRef>
+          <a:fillRef idx="3">
+            <a:schemeClr val="accent1"/>
+          </a:fillRef>
+          <a:effectRef idx="2">
+            <a:schemeClr val="accent1"/>
+          </a:effectRef>
+          <a:fontRef idx="minor">
+            <a:schemeClr val="lt1"/>
+          </a:fontRef>
+        </p:style>
+        <p:txBody>
+          <a:bodyPr rtlCol="0" anchor="ctr"/>
+          <a:lstStyle/>
+          <a:p>
+            <a:pPr algn="ctr"/>
+          </a:p>
+        </p:txBody>
+      </p:sp>
+      <p:sp>
+        <p:nvSpPr>
+          <p:cNvPr id="69" name="DBR + MLA substrate / TCTA:B3PyMPM:Ir(dmppy-ph)₂tmd right"/>
+          <p:cNvSpPr/>
+          <p:nvPr/>
+        </p:nvSpPr>
+        <p:spPr>
+          <a:xfrm>
+            <a:off x="9492105" y="3200951"/>
+            <a:ext cx="195938" cy="487667"/>
+          </a:xfrm>
+          <a:custGeom>
+            <a:avLst/>
+            <a:gdLst/>
+            <a:ahLst/>
+            <a:cxnLst/>
+            <a:rect l="l" t="t" r="r" b="b"/>
+            <a:pathLst>
+              <a:path w="195938" h="487667">
+                <a:moveTo>
+                  <a:pt x="0" y="487667"/>
+                </a:moveTo>
+                <a:lnTo>
+                  <a:pt x="195938" y="313500"/>
+                </a:lnTo>
+                <a:lnTo>
+                  <a:pt x="195938" y="0"/>
+                </a:lnTo>
+                <a:lnTo>
+                  <a:pt x="0" y="174167"/>
+                </a:lnTo>
+                <a:close/>
+              </a:path>
+            </a:pathLst>
+          </a:custGeom>
+          <a:solidFill>
+            <a:srgbClr val="963131"/>
+          </a:solidFill>
+          <a:ln w="9525">
+            <a:solidFill>
+              <a:srgbClr val="5D666F"/>
+            </a:solidFill>
+          </a:ln>
+          <a:effectLst/>
+        </p:spPr>
+        <p:style>
+          <a:lnRef idx="1">
+            <a:schemeClr val="accent1"/>
+          </a:lnRef>
+          <a:fillRef idx="3">
+            <a:schemeClr val="accent1"/>
+          </a:fillRef>
+          <a:effectRef idx="2">
+            <a:schemeClr val="accent1"/>
+          </a:effectRef>
+          <a:fontRef idx="minor">
+            <a:schemeClr val="lt1"/>
+          </a:fontRef>
+        </p:style>
+        <p:txBody>
+          <a:bodyPr rtlCol="0" anchor="ctr"/>
+          <a:lstStyle/>
+          <a:p>
+            <a:pPr algn="ctr"/>
+          </a:p>
+        </p:txBody>
+      </p:sp>
+      <p:sp>
+        <p:nvSpPr>
+          <p:cNvPr id="70" name="DBR + MLA substrate / TCTA:B3PyMPM:Ir(dmppy-ph)₂tmd front"/>
           <p:cNvSpPr/>
           <p:nvPr/>
         </p:nvSpPr>
@@ -6942,74 +8081,7 @@
       </p:sp>
       <p:sp>
         <p:nvSpPr>
-          <p:cNvPr id="54" name="DBR + MLA substrate / TCTA:B3PyMPM:Ir(dmppy-ph)₂tmd side"/>
-          <p:cNvSpPr/>
-          <p:nvPr/>
-        </p:nvSpPr>
-        <p:spPr>
-          <a:xfrm>
-            <a:off x="9492105" y="3200951"/>
-            <a:ext cx="278668" cy="487667"/>
-          </a:xfrm>
-          <a:custGeom>
-            <a:avLst/>
-            <a:gdLst/>
-            <a:ahLst/>
-            <a:cxnLst/>
-            <a:rect l="l" t="t" r="r" b="b"/>
-            <a:pathLst>
-              <a:path w="278668" h="487667">
-                <a:moveTo>
-                  <a:pt x="0" y="487667"/>
-                </a:moveTo>
-                <a:lnTo>
-                  <a:pt x="278668" y="313500"/>
-                </a:lnTo>
-                <a:lnTo>
-                  <a:pt x="278668" y="0"/>
-                </a:lnTo>
-                <a:lnTo>
-                  <a:pt x="0" y="174167"/>
-                </a:lnTo>
-                <a:close/>
-              </a:path>
-            </a:pathLst>
-          </a:custGeom>
-          <a:solidFill>
-            <a:srgbClr val="8B2D2D"/>
-          </a:solidFill>
-          <a:ln w="9525">
-            <a:solidFill>
-              <a:srgbClr val="5D666F"/>
-            </a:solidFill>
-          </a:ln>
-          <a:effectLst/>
-        </p:spPr>
-        <p:style>
-          <a:lnRef idx="1">
-            <a:schemeClr val="accent1"/>
-          </a:lnRef>
-          <a:fillRef idx="3">
-            <a:schemeClr val="accent1"/>
-          </a:fillRef>
-          <a:effectRef idx="2">
-            <a:schemeClr val="accent1"/>
-          </a:effectRef>
-          <a:fontRef idx="minor">
-            <a:schemeClr val="lt1"/>
-          </a:fontRef>
-        </p:style>
-        <p:txBody>
-          <a:bodyPr rtlCol="0" anchor="ctr"/>
-          <a:lstStyle/>
-          <a:p>
-            <a:pPr algn="ctr"/>
-          </a:p>
-        </p:txBody>
-      </p:sp>
-      <p:sp>
-        <p:nvSpPr>
-          <p:cNvPr id="55" name="DBR + MLA substrate / TCTA:B3PyMPM:Ir(dmppy-ph)₂tmd label"/>
+          <p:cNvPr id="71" name="DBR + MLA substrate / TCTA:B3PyMPM:Ir(dmppy-ph)₂tmd label"/>
           <p:cNvSpPr txBox="1"/>
           <p:nvPr/>
         </p:nvSpPr>
@@ -7062,7 +8134,141 @@
       </p:sp>
       <p:sp>
         <p:nvSpPr>
-          <p:cNvPr id="56" name="DBR + MLA substrate / B3PyMPM front"/>
+          <p:cNvPr id="72" name="DBR + MLA substrate / B3PyMPM left"/>
+          <p:cNvSpPr/>
+          <p:nvPr/>
+        </p:nvSpPr>
+        <p:spPr>
+          <a:xfrm>
+            <a:off x="6683661" y="2913575"/>
+            <a:ext cx="195938" cy="461543"/>
+          </a:xfrm>
+          <a:custGeom>
+            <a:avLst/>
+            <a:gdLst/>
+            <a:ahLst/>
+            <a:cxnLst/>
+            <a:rect l="l" t="t" r="r" b="b"/>
+            <a:pathLst>
+              <a:path w="195938" h="461543">
+                <a:moveTo>
+                  <a:pt x="195938" y="461543"/>
+                </a:moveTo>
+                <a:lnTo>
+                  <a:pt x="0" y="287376"/>
+                </a:lnTo>
+                <a:lnTo>
+                  <a:pt x="0" y="0"/>
+                </a:lnTo>
+                <a:lnTo>
+                  <a:pt x="195938" y="174167"/>
+                </a:lnTo>
+                <a:close/>
+              </a:path>
+            </a:pathLst>
+          </a:custGeom>
+          <a:solidFill>
+            <a:srgbClr val="6B81B7"/>
+          </a:solidFill>
+          <a:ln w="9525">
+            <a:solidFill>
+              <a:srgbClr val="5D666F"/>
+            </a:solidFill>
+          </a:ln>
+          <a:effectLst/>
+        </p:spPr>
+        <p:style>
+          <a:lnRef idx="1">
+            <a:schemeClr val="accent1"/>
+          </a:lnRef>
+          <a:fillRef idx="3">
+            <a:schemeClr val="accent1"/>
+          </a:fillRef>
+          <a:effectRef idx="2">
+            <a:schemeClr val="accent1"/>
+          </a:effectRef>
+          <a:fontRef idx="minor">
+            <a:schemeClr val="lt1"/>
+          </a:fontRef>
+        </p:style>
+        <p:txBody>
+          <a:bodyPr rtlCol="0" anchor="ctr"/>
+          <a:lstStyle/>
+          <a:p>
+            <a:pPr algn="ctr"/>
+          </a:p>
+        </p:txBody>
+      </p:sp>
+      <p:sp>
+        <p:nvSpPr>
+          <p:cNvPr id="73" name="DBR + MLA substrate / B3PyMPM right"/>
+          <p:cNvSpPr/>
+          <p:nvPr/>
+        </p:nvSpPr>
+        <p:spPr>
+          <a:xfrm>
+            <a:off x="9492105" y="2913575"/>
+            <a:ext cx="195938" cy="461543"/>
+          </a:xfrm>
+          <a:custGeom>
+            <a:avLst/>
+            <a:gdLst/>
+            <a:ahLst/>
+            <a:cxnLst/>
+            <a:rect l="l" t="t" r="r" b="b"/>
+            <a:pathLst>
+              <a:path w="195938" h="461543">
+                <a:moveTo>
+                  <a:pt x="0" y="461543"/>
+                </a:moveTo>
+                <a:lnTo>
+                  <a:pt x="195938" y="287376"/>
+                </a:lnTo>
+                <a:lnTo>
+                  <a:pt x="195938" y="0"/>
+                </a:lnTo>
+                <a:lnTo>
+                  <a:pt x="0" y="174167"/>
+                </a:lnTo>
+                <a:close/>
+              </a:path>
+            </a:pathLst>
+          </a:custGeom>
+          <a:solidFill>
+            <a:srgbClr val="6B81B7"/>
+          </a:solidFill>
+          <a:ln w="9525">
+            <a:solidFill>
+              <a:srgbClr val="5D666F"/>
+            </a:solidFill>
+          </a:ln>
+          <a:effectLst/>
+        </p:spPr>
+        <p:style>
+          <a:lnRef idx="1">
+            <a:schemeClr val="accent1"/>
+          </a:lnRef>
+          <a:fillRef idx="3">
+            <a:schemeClr val="accent1"/>
+          </a:fillRef>
+          <a:effectRef idx="2">
+            <a:schemeClr val="accent1"/>
+          </a:effectRef>
+          <a:fontRef idx="minor">
+            <a:schemeClr val="lt1"/>
+          </a:fontRef>
+        </p:style>
+        <p:txBody>
+          <a:bodyPr rtlCol="0" anchor="ctr"/>
+          <a:lstStyle/>
+          <a:p>
+            <a:pPr algn="ctr"/>
+          </a:p>
+        </p:txBody>
+      </p:sp>
+      <p:sp>
+        <p:nvSpPr>
+          <p:cNvPr id="74" name="DBR + MLA substrate / B3PyMPM front"/>
           <p:cNvSpPr/>
           <p:nvPr/>
         </p:nvSpPr>
@@ -7129,74 +8335,7 @@
       </p:sp>
       <p:sp>
         <p:nvSpPr>
-          <p:cNvPr id="57" name="DBR + MLA substrate / B3PyMPM side"/>
-          <p:cNvSpPr/>
-          <p:nvPr/>
-        </p:nvSpPr>
-        <p:spPr>
-          <a:xfrm>
-            <a:off x="9492105" y="2913575"/>
-            <a:ext cx="278668" cy="461543"/>
-          </a:xfrm>
-          <a:custGeom>
-            <a:avLst/>
-            <a:gdLst/>
-            <a:ahLst/>
-            <a:cxnLst/>
-            <a:rect l="l" t="t" r="r" b="b"/>
-            <a:pathLst>
-              <a:path w="278668" h="461543">
-                <a:moveTo>
-                  <a:pt x="0" y="461543"/>
-                </a:moveTo>
-                <a:lnTo>
-                  <a:pt x="278668" y="287376"/>
-                </a:lnTo>
-                <a:lnTo>
-                  <a:pt x="278668" y="0"/>
-                </a:lnTo>
-                <a:lnTo>
-                  <a:pt x="0" y="174167"/>
-                </a:lnTo>
-                <a:close/>
-              </a:path>
-            </a:pathLst>
-          </a:custGeom>
-          <a:solidFill>
-            <a:srgbClr val="6378AA"/>
-          </a:solidFill>
-          <a:ln w="9525">
-            <a:solidFill>
-              <a:srgbClr val="5D666F"/>
-            </a:solidFill>
-          </a:ln>
-          <a:effectLst/>
-        </p:spPr>
-        <p:style>
-          <a:lnRef idx="1">
-            <a:schemeClr val="accent1"/>
-          </a:lnRef>
-          <a:fillRef idx="3">
-            <a:schemeClr val="accent1"/>
-          </a:fillRef>
-          <a:effectRef idx="2">
-            <a:schemeClr val="accent1"/>
-          </a:effectRef>
-          <a:fontRef idx="minor">
-            <a:schemeClr val="lt1"/>
-          </a:fontRef>
-        </p:style>
-        <p:txBody>
-          <a:bodyPr rtlCol="0" anchor="ctr"/>
-          <a:lstStyle/>
-          <a:p>
-            <a:pPr algn="ctr"/>
-          </a:p>
-        </p:txBody>
-      </p:sp>
-      <p:sp>
-        <p:nvSpPr>
-          <p:cNvPr id="58" name="DBR + MLA substrate / B3PyMPM label"/>
+          <p:cNvPr id="75" name="DBR + MLA substrate / B3PyMPM label"/>
           <p:cNvSpPr txBox="1"/>
           <p:nvPr/>
         </p:nvSpPr>
@@ -7231,7 +8370,141 @@
       </p:sp>
       <p:sp>
         <p:nvSpPr>
-          <p:cNvPr id="59" name="DBR + MLA substrate / Al/Liq front"/>
+          <p:cNvPr id="76" name="DBR + MLA substrate / Al/Liq left"/>
+          <p:cNvSpPr/>
+          <p:nvPr/>
+        </p:nvSpPr>
+        <p:spPr>
+          <a:xfrm>
+            <a:off x="6683661" y="2634908"/>
+            <a:ext cx="195938" cy="452834"/>
+          </a:xfrm>
+          <a:custGeom>
+            <a:avLst/>
+            <a:gdLst/>
+            <a:ahLst/>
+            <a:cxnLst/>
+            <a:rect l="l" t="t" r="r" b="b"/>
+            <a:pathLst>
+              <a:path w="195938" h="452834">
+                <a:moveTo>
+                  <a:pt x="195938" y="452834"/>
+                </a:moveTo>
+                <a:lnTo>
+                  <a:pt x="0" y="278667"/>
+                </a:lnTo>
+                <a:lnTo>
+                  <a:pt x="0" y="0"/>
+                </a:lnTo>
+                <a:lnTo>
+                  <a:pt x="195938" y="174167"/>
+                </a:lnTo>
+                <a:close/>
+              </a:path>
+            </a:pathLst>
+          </a:custGeom>
+          <a:solidFill>
+            <a:srgbClr val="9BA0A5"/>
+          </a:solidFill>
+          <a:ln w="9525">
+            <a:solidFill>
+              <a:srgbClr val="5D666F"/>
+            </a:solidFill>
+          </a:ln>
+          <a:effectLst/>
+        </p:spPr>
+        <p:style>
+          <a:lnRef idx="1">
+            <a:schemeClr val="accent1"/>
+          </a:lnRef>
+          <a:fillRef idx="3">
+            <a:schemeClr val="accent1"/>
+          </a:fillRef>
+          <a:effectRef idx="2">
+            <a:schemeClr val="accent1"/>
+          </a:effectRef>
+          <a:fontRef idx="minor">
+            <a:schemeClr val="lt1"/>
+          </a:fontRef>
+        </p:style>
+        <p:txBody>
+          <a:bodyPr rtlCol="0" anchor="ctr"/>
+          <a:lstStyle/>
+          <a:p>
+            <a:pPr algn="ctr"/>
+          </a:p>
+        </p:txBody>
+      </p:sp>
+      <p:sp>
+        <p:nvSpPr>
+          <p:cNvPr id="77" name="DBR + MLA substrate / Al/Liq right"/>
+          <p:cNvSpPr/>
+          <p:nvPr/>
+        </p:nvSpPr>
+        <p:spPr>
+          <a:xfrm>
+            <a:off x="9492105" y="2634908"/>
+            <a:ext cx="195938" cy="452834"/>
+          </a:xfrm>
+          <a:custGeom>
+            <a:avLst/>
+            <a:gdLst/>
+            <a:ahLst/>
+            <a:cxnLst/>
+            <a:rect l="l" t="t" r="r" b="b"/>
+            <a:pathLst>
+              <a:path w="195938" h="452834">
+                <a:moveTo>
+                  <a:pt x="0" y="452834"/>
+                </a:moveTo>
+                <a:lnTo>
+                  <a:pt x="195938" y="278667"/>
+                </a:lnTo>
+                <a:lnTo>
+                  <a:pt x="195938" y="0"/>
+                </a:lnTo>
+                <a:lnTo>
+                  <a:pt x="0" y="174167"/>
+                </a:lnTo>
+                <a:close/>
+              </a:path>
+            </a:pathLst>
+          </a:custGeom>
+          <a:solidFill>
+            <a:srgbClr val="9BA0A5"/>
+          </a:solidFill>
+          <a:ln w="9525">
+            <a:solidFill>
+              <a:srgbClr val="5D666F"/>
+            </a:solidFill>
+          </a:ln>
+          <a:effectLst/>
+        </p:spPr>
+        <p:style>
+          <a:lnRef idx="1">
+            <a:schemeClr val="accent1"/>
+          </a:lnRef>
+          <a:fillRef idx="3">
+            <a:schemeClr val="accent1"/>
+          </a:fillRef>
+          <a:effectRef idx="2">
+            <a:schemeClr val="accent1"/>
+          </a:effectRef>
+          <a:fontRef idx="minor">
+            <a:schemeClr val="lt1"/>
+          </a:fontRef>
+        </p:style>
+        <p:txBody>
+          <a:bodyPr rtlCol="0" anchor="ctr"/>
+          <a:lstStyle/>
+          <a:p>
+            <a:pPr algn="ctr"/>
+          </a:p>
+        </p:txBody>
+      </p:sp>
+      <p:sp>
+        <p:nvSpPr>
+          <p:cNvPr id="78" name="DBR + MLA substrate / Al/Liq front"/>
           <p:cNvSpPr/>
           <p:nvPr/>
         </p:nvSpPr>
@@ -7298,74 +8571,7 @@
       </p:sp>
       <p:sp>
         <p:nvSpPr>
-          <p:cNvPr id="60" name="DBR + MLA substrate / Al/Liq side"/>
-          <p:cNvSpPr/>
-          <p:nvPr/>
-        </p:nvSpPr>
-        <p:spPr>
-          <a:xfrm>
-            <a:off x="9492105" y="2634908"/>
-            <a:ext cx="278668" cy="452834"/>
-          </a:xfrm>
-          <a:custGeom>
-            <a:avLst/>
-            <a:gdLst/>
-            <a:ahLst/>
-            <a:cxnLst/>
-            <a:rect l="l" t="t" r="r" b="b"/>
-            <a:pathLst>
-              <a:path w="278668" h="452834">
-                <a:moveTo>
-                  <a:pt x="0" y="452834"/>
-                </a:moveTo>
-                <a:lnTo>
-                  <a:pt x="278668" y="278667"/>
-                </a:lnTo>
-                <a:lnTo>
-                  <a:pt x="278668" y="0"/>
-                </a:lnTo>
-                <a:lnTo>
-                  <a:pt x="0" y="174167"/>
-                </a:lnTo>
-                <a:close/>
-              </a:path>
-            </a:pathLst>
-          </a:custGeom>
-          <a:solidFill>
-            <a:srgbClr val="90959A"/>
-          </a:solidFill>
-          <a:ln w="9525">
-            <a:solidFill>
-              <a:srgbClr val="5D666F"/>
-            </a:solidFill>
-          </a:ln>
-          <a:effectLst/>
-        </p:spPr>
-        <p:style>
-          <a:lnRef idx="1">
-            <a:schemeClr val="accent1"/>
-          </a:lnRef>
-          <a:fillRef idx="3">
-            <a:schemeClr val="accent1"/>
-          </a:fillRef>
-          <a:effectRef idx="2">
-            <a:schemeClr val="accent1"/>
-          </a:effectRef>
-          <a:fontRef idx="minor">
-            <a:schemeClr val="lt1"/>
-          </a:fontRef>
-        </p:style>
-        <p:txBody>
-          <a:bodyPr rtlCol="0" anchor="ctr"/>
-          <a:lstStyle/>
-          <a:p>
-            <a:pPr algn="ctr"/>
-          </a:p>
-        </p:txBody>
-      </p:sp>
-      <p:sp>
-        <p:nvSpPr>
-          <p:cNvPr id="61" name="DBR + MLA substrate / Al/Liq label"/>
+          <p:cNvPr id="79" name="DBR + MLA substrate / Al/Liq label"/>
           <p:cNvSpPr txBox="1"/>
           <p:nvPr/>
         </p:nvSpPr>
@@ -7400,7 +8606,141 @@
       </p:sp>
       <p:sp>
         <p:nvSpPr>
-          <p:cNvPr id="62" name="DBR + MLA substrate / DBR pair 1 front"/>
+          <p:cNvPr id="80" name="DBR + MLA substrate / DBR pair 1 left"/>
+          <p:cNvSpPr/>
+          <p:nvPr/>
+        </p:nvSpPr>
+        <p:spPr>
+          <a:xfrm>
+            <a:off x="6683661" y="2576126"/>
+            <a:ext cx="195938" cy="232949"/>
+          </a:xfrm>
+          <a:custGeom>
+            <a:avLst/>
+            <a:gdLst/>
+            <a:ahLst/>
+            <a:cxnLst/>
+            <a:rect l="l" t="t" r="r" b="b"/>
+            <a:pathLst>
+              <a:path w="195938" h="232949">
+                <a:moveTo>
+                  <a:pt x="195938" y="232949"/>
+                </a:moveTo>
+                <a:lnTo>
+                  <a:pt x="0" y="58782"/>
+                </a:lnTo>
+                <a:lnTo>
+                  <a:pt x="0" y="0"/>
+                </a:lnTo>
+                <a:lnTo>
+                  <a:pt x="195938" y="174167"/>
+                </a:lnTo>
+                <a:close/>
+              </a:path>
+            </a:pathLst>
+          </a:custGeom>
+          <a:solidFill>
+            <a:srgbClr val="862222"/>
+          </a:solidFill>
+          <a:ln w="9525">
+            <a:solidFill>
+              <a:srgbClr val="5D666F"/>
+            </a:solidFill>
+          </a:ln>
+          <a:effectLst/>
+        </p:spPr>
+        <p:style>
+          <a:lnRef idx="1">
+            <a:schemeClr val="accent1"/>
+          </a:lnRef>
+          <a:fillRef idx="3">
+            <a:schemeClr val="accent1"/>
+          </a:fillRef>
+          <a:effectRef idx="2">
+            <a:schemeClr val="accent1"/>
+          </a:effectRef>
+          <a:fontRef idx="minor">
+            <a:schemeClr val="lt1"/>
+          </a:fontRef>
+        </p:style>
+        <p:txBody>
+          <a:bodyPr rtlCol="0" anchor="ctr"/>
+          <a:lstStyle/>
+          <a:p>
+            <a:pPr algn="ctr"/>
+          </a:p>
+        </p:txBody>
+      </p:sp>
+      <p:sp>
+        <p:nvSpPr>
+          <p:cNvPr id="81" name="DBR + MLA substrate / DBR pair 1 right"/>
+          <p:cNvSpPr/>
+          <p:nvPr/>
+        </p:nvSpPr>
+        <p:spPr>
+          <a:xfrm>
+            <a:off x="9492105" y="2576126"/>
+            <a:ext cx="195938" cy="232949"/>
+          </a:xfrm>
+          <a:custGeom>
+            <a:avLst/>
+            <a:gdLst/>
+            <a:ahLst/>
+            <a:cxnLst/>
+            <a:rect l="l" t="t" r="r" b="b"/>
+            <a:pathLst>
+              <a:path w="195938" h="232949">
+                <a:moveTo>
+                  <a:pt x="0" y="232949"/>
+                </a:moveTo>
+                <a:lnTo>
+                  <a:pt x="195938" y="58782"/>
+                </a:lnTo>
+                <a:lnTo>
+                  <a:pt x="195938" y="0"/>
+                </a:lnTo>
+                <a:lnTo>
+                  <a:pt x="0" y="174167"/>
+                </a:lnTo>
+                <a:close/>
+              </a:path>
+            </a:pathLst>
+          </a:custGeom>
+          <a:solidFill>
+            <a:srgbClr val="862222"/>
+          </a:solidFill>
+          <a:ln w="9525">
+            <a:solidFill>
+              <a:srgbClr val="5D666F"/>
+            </a:solidFill>
+          </a:ln>
+          <a:effectLst/>
+        </p:spPr>
+        <p:style>
+          <a:lnRef idx="1">
+            <a:schemeClr val="accent1"/>
+          </a:lnRef>
+          <a:fillRef idx="3">
+            <a:schemeClr val="accent1"/>
+          </a:fillRef>
+          <a:effectRef idx="2">
+            <a:schemeClr val="accent1"/>
+          </a:effectRef>
+          <a:fontRef idx="minor">
+            <a:schemeClr val="lt1"/>
+          </a:fontRef>
+        </p:style>
+        <p:txBody>
+          <a:bodyPr rtlCol="0" anchor="ctr"/>
+          <a:lstStyle/>
+          <a:p>
+            <a:pPr algn="ctr"/>
+          </a:p>
+        </p:txBody>
+      </p:sp>
+      <p:sp>
+        <p:nvSpPr>
+          <p:cNvPr id="82" name="DBR + MLA substrate / DBR pair 1 front"/>
           <p:cNvSpPr/>
           <p:nvPr/>
         </p:nvSpPr>
@@ -7467,14 +8807,14 @@
       </p:sp>
       <p:sp>
         <p:nvSpPr>
-          <p:cNvPr id="63" name="DBR + MLA substrate / DBR pair 1 side"/>
+          <p:cNvPr id="83" name="DBR + MLA substrate / DBR pair 1 left"/>
           <p:cNvSpPr/>
           <p:nvPr/>
         </p:nvSpPr>
         <p:spPr>
           <a:xfrm>
-            <a:off x="9492105" y="2576126"/>
-            <a:ext cx="278668" cy="232949"/>
+            <a:off x="6683661" y="2517345"/>
+            <a:ext cx="195938" cy="232948"/>
           </a:xfrm>
           <a:custGeom>
             <a:avLst/>
@@ -7483,25 +8823,25 @@
             <a:cxnLst/>
             <a:rect l="l" t="t" r="r" b="b"/>
             <a:pathLst>
-              <a:path w="278668" h="232949">
+              <a:path w="195938" h="232948">
                 <a:moveTo>
-                  <a:pt x="0" y="232949"/>
+                  <a:pt x="195938" y="232948"/>
                 </a:moveTo>
                 <a:lnTo>
-                  <a:pt x="278668" y="58782"/>
-                </a:lnTo>
-                <a:lnTo>
-                  <a:pt x="278668" y="0"/>
-                </a:lnTo>
-                <a:lnTo>
-                  <a:pt x="0" y="174167"/>
+                  <a:pt x="0" y="58781"/>
+                </a:lnTo>
+                <a:lnTo>
+                  <a:pt x="0" y="0"/>
+                </a:lnTo>
+                <a:lnTo>
+                  <a:pt x="195938" y="174167"/>
                 </a:lnTo>
                 <a:close/>
               </a:path>
             </a:pathLst>
           </a:custGeom>
           <a:solidFill>
-            <a:srgbClr val="7D1F1F"/>
+            <a:srgbClr val="24272B"/>
           </a:solidFill>
           <a:ln w="9525">
             <a:solidFill>
@@ -7534,7 +8874,74 @@
       </p:sp>
       <p:sp>
         <p:nvSpPr>
-          <p:cNvPr id="64" name="DBR + MLA substrate / DBR pair 1 front"/>
+          <p:cNvPr id="84" name="DBR + MLA substrate / DBR pair 1 right"/>
+          <p:cNvSpPr/>
+          <p:nvPr/>
+        </p:nvSpPr>
+        <p:spPr>
+          <a:xfrm>
+            <a:off x="9492105" y="2517345"/>
+            <a:ext cx="195938" cy="232948"/>
+          </a:xfrm>
+          <a:custGeom>
+            <a:avLst/>
+            <a:gdLst/>
+            <a:ahLst/>
+            <a:cxnLst/>
+            <a:rect l="l" t="t" r="r" b="b"/>
+            <a:pathLst>
+              <a:path w="195938" h="232948">
+                <a:moveTo>
+                  <a:pt x="0" y="232948"/>
+                </a:moveTo>
+                <a:lnTo>
+                  <a:pt x="195938" y="58781"/>
+                </a:lnTo>
+                <a:lnTo>
+                  <a:pt x="195938" y="0"/>
+                </a:lnTo>
+                <a:lnTo>
+                  <a:pt x="0" y="174167"/>
+                </a:lnTo>
+                <a:close/>
+              </a:path>
+            </a:pathLst>
+          </a:custGeom>
+          <a:solidFill>
+            <a:srgbClr val="24272B"/>
+          </a:solidFill>
+          <a:ln w="9525">
+            <a:solidFill>
+              <a:srgbClr val="5D666F"/>
+            </a:solidFill>
+          </a:ln>
+          <a:effectLst/>
+        </p:spPr>
+        <p:style>
+          <a:lnRef idx="1">
+            <a:schemeClr val="accent1"/>
+          </a:lnRef>
+          <a:fillRef idx="3">
+            <a:schemeClr val="accent1"/>
+          </a:fillRef>
+          <a:effectRef idx="2">
+            <a:schemeClr val="accent1"/>
+          </a:effectRef>
+          <a:fontRef idx="minor">
+            <a:schemeClr val="lt1"/>
+          </a:fontRef>
+        </p:style>
+        <p:txBody>
+          <a:bodyPr rtlCol="0" anchor="ctr"/>
+          <a:lstStyle/>
+          <a:p>
+            <a:pPr algn="ctr"/>
+          </a:p>
+        </p:txBody>
+      </p:sp>
+      <p:sp>
+        <p:nvSpPr>
+          <p:cNvPr id="85" name="DBR + MLA substrate / DBR pair 1 front"/>
           <p:cNvSpPr/>
           <p:nvPr/>
         </p:nvSpPr>
@@ -7601,14 +9008,14 @@
       </p:sp>
       <p:sp>
         <p:nvSpPr>
-          <p:cNvPr id="65" name="DBR + MLA substrate / DBR pair 1 side"/>
+          <p:cNvPr id="86" name="DBR + MLA substrate / DBR pair 2 left"/>
           <p:cNvSpPr/>
           <p:nvPr/>
         </p:nvSpPr>
         <p:spPr>
           <a:xfrm>
-            <a:off x="9492105" y="2517345"/>
-            <a:ext cx="278668" cy="232948"/>
+            <a:off x="6683661" y="2458564"/>
+            <a:ext cx="195938" cy="232948"/>
           </a:xfrm>
           <a:custGeom>
             <a:avLst/>
@@ -7617,25 +9024,25 @@
             <a:cxnLst/>
             <a:rect l="l" t="t" r="r" b="b"/>
             <a:pathLst>
-              <a:path w="278668" h="232948">
+              <a:path w="195938" h="232948">
                 <a:moveTo>
-                  <a:pt x="0" y="232948"/>
+                  <a:pt x="195938" y="232948"/>
                 </a:moveTo>
                 <a:lnTo>
-                  <a:pt x="278668" y="58781"/>
-                </a:lnTo>
-                <a:lnTo>
-                  <a:pt x="278668" y="0"/>
-                </a:lnTo>
-                <a:lnTo>
-                  <a:pt x="0" y="174167"/>
+                  <a:pt x="0" y="58781"/>
+                </a:lnTo>
+                <a:lnTo>
+                  <a:pt x="0" y="0"/>
+                </a:lnTo>
+                <a:lnTo>
+                  <a:pt x="195938" y="174167"/>
                 </a:lnTo>
                 <a:close/>
               </a:path>
             </a:pathLst>
           </a:custGeom>
           <a:solidFill>
-            <a:srgbClr val="222528"/>
+            <a:srgbClr val="862222"/>
           </a:solidFill>
           <a:ln w="9525">
             <a:solidFill>
@@ -7668,7 +9075,74 @@
       </p:sp>
       <p:sp>
         <p:nvSpPr>
-          <p:cNvPr id="66" name="DBR + MLA substrate / DBR pair 2 front"/>
+          <p:cNvPr id="87" name="DBR + MLA substrate / DBR pair 2 right"/>
+          <p:cNvSpPr/>
+          <p:nvPr/>
+        </p:nvSpPr>
+        <p:spPr>
+          <a:xfrm>
+            <a:off x="9492105" y="2458564"/>
+            <a:ext cx="195938" cy="232948"/>
+          </a:xfrm>
+          <a:custGeom>
+            <a:avLst/>
+            <a:gdLst/>
+            <a:ahLst/>
+            <a:cxnLst/>
+            <a:rect l="l" t="t" r="r" b="b"/>
+            <a:pathLst>
+              <a:path w="195938" h="232948">
+                <a:moveTo>
+                  <a:pt x="0" y="232948"/>
+                </a:moveTo>
+                <a:lnTo>
+                  <a:pt x="195938" y="58781"/>
+                </a:lnTo>
+                <a:lnTo>
+                  <a:pt x="195938" y="0"/>
+                </a:lnTo>
+                <a:lnTo>
+                  <a:pt x="0" y="174167"/>
+                </a:lnTo>
+                <a:close/>
+              </a:path>
+            </a:pathLst>
+          </a:custGeom>
+          <a:solidFill>
+            <a:srgbClr val="862222"/>
+          </a:solidFill>
+          <a:ln w="9525">
+            <a:solidFill>
+              <a:srgbClr val="5D666F"/>
+            </a:solidFill>
+          </a:ln>
+          <a:effectLst/>
+        </p:spPr>
+        <p:style>
+          <a:lnRef idx="1">
+            <a:schemeClr val="accent1"/>
+          </a:lnRef>
+          <a:fillRef idx="3">
+            <a:schemeClr val="accent1"/>
+          </a:fillRef>
+          <a:effectRef idx="2">
+            <a:schemeClr val="accent1"/>
+          </a:effectRef>
+          <a:fontRef idx="minor">
+            <a:schemeClr val="lt1"/>
+          </a:fontRef>
+        </p:style>
+        <p:txBody>
+          <a:bodyPr rtlCol="0" anchor="ctr"/>
+          <a:lstStyle/>
+          <a:p>
+            <a:pPr algn="ctr"/>
+          </a:p>
+        </p:txBody>
+      </p:sp>
+      <p:sp>
+        <p:nvSpPr>
+          <p:cNvPr id="88" name="DBR + MLA substrate / DBR pair 2 front"/>
           <p:cNvSpPr/>
           <p:nvPr/>
         </p:nvSpPr>
@@ -7735,14 +9209,14 @@
       </p:sp>
       <p:sp>
         <p:nvSpPr>
-          <p:cNvPr id="67" name="DBR + MLA substrate / DBR pair 2 side"/>
+          <p:cNvPr id="89" name="DBR + MLA substrate / DBR pair 2 left"/>
           <p:cNvSpPr/>
           <p:nvPr/>
         </p:nvSpPr>
         <p:spPr>
           <a:xfrm>
-            <a:off x="9492105" y="2458564"/>
-            <a:ext cx="278668" cy="232948"/>
+            <a:off x="6683661" y="2399782"/>
+            <a:ext cx="195938" cy="232949"/>
           </a:xfrm>
           <a:custGeom>
             <a:avLst/>
@@ -7751,25 +9225,25 @@
             <a:cxnLst/>
             <a:rect l="l" t="t" r="r" b="b"/>
             <a:pathLst>
-              <a:path w="278668" h="232948">
+              <a:path w="195938" h="232949">
                 <a:moveTo>
-                  <a:pt x="0" y="232948"/>
+                  <a:pt x="195938" y="232949"/>
                 </a:moveTo>
                 <a:lnTo>
-                  <a:pt x="278668" y="58781"/>
-                </a:lnTo>
-                <a:lnTo>
-                  <a:pt x="278668" y="0"/>
-                </a:lnTo>
-                <a:lnTo>
-                  <a:pt x="0" y="174167"/>
+                  <a:pt x="0" y="58782"/>
+                </a:lnTo>
+                <a:lnTo>
+                  <a:pt x="0" y="0"/>
+                </a:lnTo>
+                <a:lnTo>
+                  <a:pt x="195938" y="174167"/>
                 </a:lnTo>
                 <a:close/>
               </a:path>
             </a:pathLst>
           </a:custGeom>
           <a:solidFill>
-            <a:srgbClr val="7D1F1F"/>
+            <a:srgbClr val="24272B"/>
           </a:solidFill>
           <a:ln w="9525">
             <a:solidFill>
@@ -7802,7 +9276,74 @@
       </p:sp>
       <p:sp>
         <p:nvSpPr>
-          <p:cNvPr id="68" name="DBR + MLA substrate / DBR pair 2 front"/>
+          <p:cNvPr id="90" name="DBR + MLA substrate / DBR pair 2 right"/>
+          <p:cNvSpPr/>
+          <p:nvPr/>
+        </p:nvSpPr>
+        <p:spPr>
+          <a:xfrm>
+            <a:off x="9492105" y="2399782"/>
+            <a:ext cx="195938" cy="232949"/>
+          </a:xfrm>
+          <a:custGeom>
+            <a:avLst/>
+            <a:gdLst/>
+            <a:ahLst/>
+            <a:cxnLst/>
+            <a:rect l="l" t="t" r="r" b="b"/>
+            <a:pathLst>
+              <a:path w="195938" h="232949">
+                <a:moveTo>
+                  <a:pt x="0" y="232949"/>
+                </a:moveTo>
+                <a:lnTo>
+                  <a:pt x="195938" y="58782"/>
+                </a:lnTo>
+                <a:lnTo>
+                  <a:pt x="195938" y="0"/>
+                </a:lnTo>
+                <a:lnTo>
+                  <a:pt x="0" y="174167"/>
+                </a:lnTo>
+                <a:close/>
+              </a:path>
+            </a:pathLst>
+          </a:custGeom>
+          <a:solidFill>
+            <a:srgbClr val="24272B"/>
+          </a:solidFill>
+          <a:ln w="9525">
+            <a:solidFill>
+              <a:srgbClr val="5D666F"/>
+            </a:solidFill>
+          </a:ln>
+          <a:effectLst/>
+        </p:spPr>
+        <p:style>
+          <a:lnRef idx="1">
+            <a:schemeClr val="accent1"/>
+          </a:lnRef>
+          <a:fillRef idx="3">
+            <a:schemeClr val="accent1"/>
+          </a:fillRef>
+          <a:effectRef idx="2">
+            <a:schemeClr val="accent1"/>
+          </a:effectRef>
+          <a:fontRef idx="minor">
+            <a:schemeClr val="lt1"/>
+          </a:fontRef>
+        </p:style>
+        <p:txBody>
+          <a:bodyPr rtlCol="0" anchor="ctr"/>
+          <a:lstStyle/>
+          <a:p>
+            <a:pPr algn="ctr"/>
+          </a:p>
+        </p:txBody>
+      </p:sp>
+      <p:sp>
+        <p:nvSpPr>
+          <p:cNvPr id="91" name="DBR + MLA substrate / DBR pair 2 front"/>
           <p:cNvSpPr/>
           <p:nvPr/>
         </p:nvSpPr>
@@ -7869,14 +9410,14 @@
       </p:sp>
       <p:sp>
         <p:nvSpPr>
-          <p:cNvPr id="69" name="DBR + MLA substrate / DBR pair 2 side"/>
+          <p:cNvPr id="92" name="DBR + MLA substrate / DBR pair 3 left"/>
           <p:cNvSpPr/>
           <p:nvPr/>
         </p:nvSpPr>
         <p:spPr>
           <a:xfrm>
-            <a:off x="9492105" y="2399782"/>
-            <a:ext cx="278668" cy="232949"/>
+            <a:off x="6683661" y="2341001"/>
+            <a:ext cx="195938" cy="232948"/>
           </a:xfrm>
           <a:custGeom>
             <a:avLst/>
@@ -7885,25 +9426,25 @@
             <a:cxnLst/>
             <a:rect l="l" t="t" r="r" b="b"/>
             <a:pathLst>
-              <a:path w="278668" h="232949">
+              <a:path w="195938" h="232948">
                 <a:moveTo>
-                  <a:pt x="0" y="232949"/>
+                  <a:pt x="195938" y="232948"/>
                 </a:moveTo>
                 <a:lnTo>
-                  <a:pt x="278668" y="58782"/>
-                </a:lnTo>
-                <a:lnTo>
-                  <a:pt x="278668" y="0"/>
-                </a:lnTo>
-                <a:lnTo>
-                  <a:pt x="0" y="174167"/>
+                  <a:pt x="0" y="58781"/>
+                </a:lnTo>
+                <a:lnTo>
+                  <a:pt x="0" y="0"/>
+                </a:lnTo>
+                <a:lnTo>
+                  <a:pt x="195938" y="174167"/>
                 </a:lnTo>
                 <a:close/>
               </a:path>
             </a:pathLst>
           </a:custGeom>
           <a:solidFill>
-            <a:srgbClr val="222528"/>
+            <a:srgbClr val="862222"/>
           </a:solidFill>
           <a:ln w="9525">
             <a:solidFill>
@@ -7936,7 +9477,74 @@
       </p:sp>
       <p:sp>
         <p:nvSpPr>
-          <p:cNvPr id="70" name="DBR + MLA substrate / DBR pair 3 front"/>
+          <p:cNvPr id="93" name="DBR + MLA substrate / DBR pair 3 right"/>
+          <p:cNvSpPr/>
+          <p:nvPr/>
+        </p:nvSpPr>
+        <p:spPr>
+          <a:xfrm>
+            <a:off x="9492105" y="2341001"/>
+            <a:ext cx="195938" cy="232948"/>
+          </a:xfrm>
+          <a:custGeom>
+            <a:avLst/>
+            <a:gdLst/>
+            <a:ahLst/>
+            <a:cxnLst/>
+            <a:rect l="l" t="t" r="r" b="b"/>
+            <a:pathLst>
+              <a:path w="195938" h="232948">
+                <a:moveTo>
+                  <a:pt x="0" y="232948"/>
+                </a:moveTo>
+                <a:lnTo>
+                  <a:pt x="195938" y="58781"/>
+                </a:lnTo>
+                <a:lnTo>
+                  <a:pt x="195938" y="0"/>
+                </a:lnTo>
+                <a:lnTo>
+                  <a:pt x="0" y="174167"/>
+                </a:lnTo>
+                <a:close/>
+              </a:path>
+            </a:pathLst>
+          </a:custGeom>
+          <a:solidFill>
+            <a:srgbClr val="862222"/>
+          </a:solidFill>
+          <a:ln w="9525">
+            <a:solidFill>
+              <a:srgbClr val="5D666F"/>
+            </a:solidFill>
+          </a:ln>
+          <a:effectLst/>
+        </p:spPr>
+        <p:style>
+          <a:lnRef idx="1">
+            <a:schemeClr val="accent1"/>
+          </a:lnRef>
+          <a:fillRef idx="3">
+            <a:schemeClr val="accent1"/>
+          </a:fillRef>
+          <a:effectRef idx="2">
+            <a:schemeClr val="accent1"/>
+          </a:effectRef>
+          <a:fontRef idx="minor">
+            <a:schemeClr val="lt1"/>
+          </a:fontRef>
+        </p:style>
+        <p:txBody>
+          <a:bodyPr rtlCol="0" anchor="ctr"/>
+          <a:lstStyle/>
+          <a:p>
+            <a:pPr algn="ctr"/>
+          </a:p>
+        </p:txBody>
+      </p:sp>
+      <p:sp>
+        <p:nvSpPr>
+          <p:cNvPr id="94" name="DBR + MLA substrate / DBR pair 3 front"/>
           <p:cNvSpPr/>
           <p:nvPr/>
         </p:nvSpPr>
@@ -8003,14 +9611,14 @@
       </p:sp>
       <p:sp>
         <p:nvSpPr>
-          <p:cNvPr id="71" name="DBR + MLA substrate / DBR pair 3 side"/>
+          <p:cNvPr id="95" name="DBR + MLA substrate / DBR pair 3 left"/>
           <p:cNvSpPr/>
           <p:nvPr/>
         </p:nvSpPr>
         <p:spPr>
           <a:xfrm>
-            <a:off x="9492105" y="2341001"/>
-            <a:ext cx="278668" cy="232948"/>
+            <a:off x="6683661" y="2282219"/>
+            <a:ext cx="195938" cy="232949"/>
           </a:xfrm>
           <a:custGeom>
             <a:avLst/>
@@ -8019,25 +9627,25 @@
             <a:cxnLst/>
             <a:rect l="l" t="t" r="r" b="b"/>
             <a:pathLst>
-              <a:path w="278668" h="232948">
+              <a:path w="195938" h="232949">
                 <a:moveTo>
-                  <a:pt x="0" y="232948"/>
+                  <a:pt x="195938" y="232949"/>
                 </a:moveTo>
                 <a:lnTo>
-                  <a:pt x="278668" y="58781"/>
-                </a:lnTo>
-                <a:lnTo>
-                  <a:pt x="278668" y="0"/>
-                </a:lnTo>
-                <a:lnTo>
-                  <a:pt x="0" y="174167"/>
+                  <a:pt x="0" y="58782"/>
+                </a:lnTo>
+                <a:lnTo>
+                  <a:pt x="0" y="0"/>
+                </a:lnTo>
+                <a:lnTo>
+                  <a:pt x="195938" y="174167"/>
                 </a:lnTo>
                 <a:close/>
               </a:path>
             </a:pathLst>
           </a:custGeom>
           <a:solidFill>
-            <a:srgbClr val="7D1F1F"/>
+            <a:srgbClr val="24272B"/>
           </a:solidFill>
           <a:ln w="9525">
             <a:solidFill>
@@ -8070,7 +9678,74 @@
       </p:sp>
       <p:sp>
         <p:nvSpPr>
-          <p:cNvPr id="72" name="DBR + MLA substrate / DBR pair 3 front"/>
+          <p:cNvPr id="96" name="DBR + MLA substrate / DBR pair 3 right"/>
+          <p:cNvSpPr/>
+          <p:nvPr/>
+        </p:nvSpPr>
+        <p:spPr>
+          <a:xfrm>
+            <a:off x="9492105" y="2282219"/>
+            <a:ext cx="195938" cy="232949"/>
+          </a:xfrm>
+          <a:custGeom>
+            <a:avLst/>
+            <a:gdLst/>
+            <a:ahLst/>
+            <a:cxnLst/>
+            <a:rect l="l" t="t" r="r" b="b"/>
+            <a:pathLst>
+              <a:path w="195938" h="232949">
+                <a:moveTo>
+                  <a:pt x="0" y="232949"/>
+                </a:moveTo>
+                <a:lnTo>
+                  <a:pt x="195938" y="58782"/>
+                </a:lnTo>
+                <a:lnTo>
+                  <a:pt x="195938" y="0"/>
+                </a:lnTo>
+                <a:lnTo>
+                  <a:pt x="0" y="174167"/>
+                </a:lnTo>
+                <a:close/>
+              </a:path>
+            </a:pathLst>
+          </a:custGeom>
+          <a:solidFill>
+            <a:srgbClr val="24272B"/>
+          </a:solidFill>
+          <a:ln w="9525">
+            <a:solidFill>
+              <a:srgbClr val="5D666F"/>
+            </a:solidFill>
+          </a:ln>
+          <a:effectLst/>
+        </p:spPr>
+        <p:style>
+          <a:lnRef idx="1">
+            <a:schemeClr val="accent1"/>
+          </a:lnRef>
+          <a:fillRef idx="3">
+            <a:schemeClr val="accent1"/>
+          </a:fillRef>
+          <a:effectRef idx="2">
+            <a:schemeClr val="accent1"/>
+          </a:effectRef>
+          <a:fontRef idx="minor">
+            <a:schemeClr val="lt1"/>
+          </a:fontRef>
+        </p:style>
+        <p:txBody>
+          <a:bodyPr rtlCol="0" anchor="ctr"/>
+          <a:lstStyle/>
+          <a:p>
+            <a:pPr algn="ctr"/>
+          </a:p>
+        </p:txBody>
+      </p:sp>
+      <p:sp>
+        <p:nvSpPr>
+          <p:cNvPr id="97" name="DBR + MLA substrate / DBR pair 3 front"/>
           <p:cNvSpPr/>
           <p:nvPr/>
         </p:nvSpPr>
@@ -8137,14 +9812,14 @@
       </p:sp>
       <p:sp>
         <p:nvSpPr>
-          <p:cNvPr id="73" name="DBR + MLA substrate / DBR pair 3 side"/>
+          <p:cNvPr id="98" name="DBR + MLA substrate / DBR pair 4 left"/>
           <p:cNvSpPr/>
           <p:nvPr/>
         </p:nvSpPr>
         <p:spPr>
           <a:xfrm>
-            <a:off x="9492105" y="2282219"/>
-            <a:ext cx="278668" cy="232949"/>
+            <a:off x="6683661" y="2223438"/>
+            <a:ext cx="195938" cy="232948"/>
           </a:xfrm>
           <a:custGeom>
             <a:avLst/>
@@ -8153,25 +9828,25 @@
             <a:cxnLst/>
             <a:rect l="l" t="t" r="r" b="b"/>
             <a:pathLst>
-              <a:path w="278668" h="232949">
+              <a:path w="195938" h="232948">
                 <a:moveTo>
-                  <a:pt x="0" y="232949"/>
+                  <a:pt x="195938" y="232948"/>
                 </a:moveTo>
                 <a:lnTo>
-                  <a:pt x="278668" y="58782"/>
-                </a:lnTo>
-                <a:lnTo>
-                  <a:pt x="278668" y="0"/>
-                </a:lnTo>
-                <a:lnTo>
-                  <a:pt x="0" y="174167"/>
+                  <a:pt x="0" y="58781"/>
+                </a:lnTo>
+                <a:lnTo>
+                  <a:pt x="0" y="0"/>
+                </a:lnTo>
+                <a:lnTo>
+                  <a:pt x="195938" y="174167"/>
                 </a:lnTo>
                 <a:close/>
               </a:path>
             </a:pathLst>
           </a:custGeom>
           <a:solidFill>
-            <a:srgbClr val="222528"/>
+            <a:srgbClr val="862222"/>
           </a:solidFill>
           <a:ln w="9525">
             <a:solidFill>
@@ -8204,7 +9879,74 @@
       </p:sp>
       <p:sp>
         <p:nvSpPr>
-          <p:cNvPr id="74" name="DBR + MLA substrate / DBR pair 4 front"/>
+          <p:cNvPr id="99" name="DBR + MLA substrate / DBR pair 4 right"/>
+          <p:cNvSpPr/>
+          <p:nvPr/>
+        </p:nvSpPr>
+        <p:spPr>
+          <a:xfrm>
+            <a:off x="9492105" y="2223438"/>
+            <a:ext cx="195938" cy="232948"/>
+          </a:xfrm>
+          <a:custGeom>
+            <a:avLst/>
+            <a:gdLst/>
+            <a:ahLst/>
+            <a:cxnLst/>
+            <a:rect l="l" t="t" r="r" b="b"/>
+            <a:pathLst>
+              <a:path w="195938" h="232948">
+                <a:moveTo>
+                  <a:pt x="0" y="232948"/>
+                </a:moveTo>
+                <a:lnTo>
+                  <a:pt x="195938" y="58781"/>
+                </a:lnTo>
+                <a:lnTo>
+                  <a:pt x="195938" y="0"/>
+                </a:lnTo>
+                <a:lnTo>
+                  <a:pt x="0" y="174167"/>
+                </a:lnTo>
+                <a:close/>
+              </a:path>
+            </a:pathLst>
+          </a:custGeom>
+          <a:solidFill>
+            <a:srgbClr val="862222"/>
+          </a:solidFill>
+          <a:ln w="9525">
+            <a:solidFill>
+              <a:srgbClr val="5D666F"/>
+            </a:solidFill>
+          </a:ln>
+          <a:effectLst/>
+        </p:spPr>
+        <p:style>
+          <a:lnRef idx="1">
+            <a:schemeClr val="accent1"/>
+          </a:lnRef>
+          <a:fillRef idx="3">
+            <a:schemeClr val="accent1"/>
+          </a:fillRef>
+          <a:effectRef idx="2">
+            <a:schemeClr val="accent1"/>
+          </a:effectRef>
+          <a:fontRef idx="minor">
+            <a:schemeClr val="lt1"/>
+          </a:fontRef>
+        </p:style>
+        <p:txBody>
+          <a:bodyPr rtlCol="0" anchor="ctr"/>
+          <a:lstStyle/>
+          <a:p>
+            <a:pPr algn="ctr"/>
+          </a:p>
+        </p:txBody>
+      </p:sp>
+      <p:sp>
+        <p:nvSpPr>
+          <p:cNvPr id="100" name="DBR + MLA substrate / DBR pair 4 front"/>
           <p:cNvSpPr/>
           <p:nvPr/>
         </p:nvSpPr>
@@ -8271,14 +10013,14 @@
       </p:sp>
       <p:sp>
         <p:nvSpPr>
-          <p:cNvPr id="75" name="DBR + MLA substrate / DBR pair 4 side"/>
+          <p:cNvPr id="101" name="DBR + MLA substrate / DBR pair 4 left"/>
           <p:cNvSpPr/>
           <p:nvPr/>
         </p:nvSpPr>
         <p:spPr>
           <a:xfrm>
-            <a:off x="9492105" y="2223438"/>
-            <a:ext cx="278668" cy="232948"/>
+            <a:off x="6683661" y="2164657"/>
+            <a:ext cx="195938" cy="232948"/>
           </a:xfrm>
           <a:custGeom>
             <a:avLst/>
@@ -8287,25 +10029,25 @@
             <a:cxnLst/>
             <a:rect l="l" t="t" r="r" b="b"/>
             <a:pathLst>
-              <a:path w="278668" h="232948">
+              <a:path w="195938" h="232948">
                 <a:moveTo>
-                  <a:pt x="0" y="232948"/>
+                  <a:pt x="195938" y="232948"/>
                 </a:moveTo>
                 <a:lnTo>
-                  <a:pt x="278668" y="58781"/>
-                </a:lnTo>
-                <a:lnTo>
-                  <a:pt x="278668" y="0"/>
-                </a:lnTo>
-                <a:lnTo>
-                  <a:pt x="0" y="174167"/>
+                  <a:pt x="0" y="58781"/>
+                </a:lnTo>
+                <a:lnTo>
+                  <a:pt x="0" y="0"/>
+                </a:lnTo>
+                <a:lnTo>
+                  <a:pt x="195938" y="174167"/>
                 </a:lnTo>
                 <a:close/>
               </a:path>
             </a:pathLst>
           </a:custGeom>
           <a:solidFill>
-            <a:srgbClr val="7D1F1F"/>
+            <a:srgbClr val="24272B"/>
           </a:solidFill>
           <a:ln w="9525">
             <a:solidFill>
@@ -8338,7 +10080,141 @@
       </p:sp>
       <p:sp>
         <p:nvSpPr>
-          <p:cNvPr id="76" name="DBR + MLA substrate / DBR pair 4 front"/>
+          <p:cNvPr id="102" name="DBR + MLA substrate / DBR pair 4 right"/>
+          <p:cNvSpPr/>
+          <p:nvPr/>
+        </p:nvSpPr>
+        <p:spPr>
+          <a:xfrm>
+            <a:off x="9492105" y="2164657"/>
+            <a:ext cx="195938" cy="232948"/>
+          </a:xfrm>
+          <a:custGeom>
+            <a:avLst/>
+            <a:gdLst/>
+            <a:ahLst/>
+            <a:cxnLst/>
+            <a:rect l="l" t="t" r="r" b="b"/>
+            <a:pathLst>
+              <a:path w="195938" h="232948">
+                <a:moveTo>
+                  <a:pt x="0" y="232948"/>
+                </a:moveTo>
+                <a:lnTo>
+                  <a:pt x="195938" y="58781"/>
+                </a:lnTo>
+                <a:lnTo>
+                  <a:pt x="195938" y="0"/>
+                </a:lnTo>
+                <a:lnTo>
+                  <a:pt x="0" y="174167"/>
+                </a:lnTo>
+                <a:close/>
+              </a:path>
+            </a:pathLst>
+          </a:custGeom>
+          <a:solidFill>
+            <a:srgbClr val="24272B"/>
+          </a:solidFill>
+          <a:ln w="9525">
+            <a:solidFill>
+              <a:srgbClr val="5D666F"/>
+            </a:solidFill>
+          </a:ln>
+          <a:effectLst/>
+        </p:spPr>
+        <p:style>
+          <a:lnRef idx="1">
+            <a:schemeClr val="accent1"/>
+          </a:lnRef>
+          <a:fillRef idx="3">
+            <a:schemeClr val="accent1"/>
+          </a:fillRef>
+          <a:effectRef idx="2">
+            <a:schemeClr val="accent1"/>
+          </a:effectRef>
+          <a:fontRef idx="minor">
+            <a:schemeClr val="lt1"/>
+          </a:fontRef>
+        </p:style>
+        <p:txBody>
+          <a:bodyPr rtlCol="0" anchor="ctr"/>
+          <a:lstStyle/>
+          <a:p>
+            <a:pPr algn="ctr"/>
+          </a:p>
+        </p:txBody>
+      </p:sp>
+      <p:sp>
+        <p:nvSpPr>
+          <p:cNvPr id="103" name="DBR + MLA substrate / DBR pair 4 top"/>
+          <p:cNvSpPr/>
+          <p:nvPr/>
+        </p:nvSpPr>
+        <p:spPr>
+          <a:xfrm>
+            <a:off x="6683661" y="2164657"/>
+            <a:ext cx="3004382" cy="174167"/>
+          </a:xfrm>
+          <a:custGeom>
+            <a:avLst/>
+            <a:gdLst/>
+            <a:ahLst/>
+            <a:cxnLst/>
+            <a:rect l="l" t="t" r="r" b="b"/>
+            <a:pathLst>
+              <a:path w="3004382" h="174167">
+                <a:moveTo>
+                  <a:pt x="195938" y="174167"/>
+                </a:moveTo>
+                <a:lnTo>
+                  <a:pt x="2808444" y="174167"/>
+                </a:lnTo>
+                <a:lnTo>
+                  <a:pt x="3004382" y="0"/>
+                </a:lnTo>
+                <a:lnTo>
+                  <a:pt x="0" y="0"/>
+                </a:lnTo>
+                <a:close/>
+              </a:path>
+            </a:pathLst>
+          </a:custGeom>
+          <a:solidFill>
+            <a:srgbClr val="2F3438"/>
+          </a:solidFill>
+          <a:ln w="9525">
+            <a:solidFill>
+              <a:srgbClr val="5D666F"/>
+            </a:solidFill>
+          </a:ln>
+          <a:effectLst/>
+        </p:spPr>
+        <p:style>
+          <a:lnRef idx="1">
+            <a:schemeClr val="accent1"/>
+          </a:lnRef>
+          <a:fillRef idx="3">
+            <a:schemeClr val="accent1"/>
+          </a:fillRef>
+          <a:effectRef idx="2">
+            <a:schemeClr val="accent1"/>
+          </a:effectRef>
+          <a:fontRef idx="minor">
+            <a:schemeClr val="lt1"/>
+          </a:fontRef>
+        </p:style>
+        <p:txBody>
+          <a:bodyPr rtlCol="0" anchor="ctr"/>
+          <a:lstStyle/>
+          <a:p>
+            <a:pPr algn="ctr"/>
+          </a:p>
+        </p:txBody>
+      </p:sp>
+      <p:sp>
+        <p:nvSpPr>
+          <p:cNvPr id="104" name="DBR + MLA substrate / DBR pair 4 front"/>
           <p:cNvSpPr/>
           <p:nvPr/>
         </p:nvSpPr>
@@ -8405,141 +10281,7 @@
       </p:sp>
       <p:sp>
         <p:nvSpPr>
-          <p:cNvPr id="77" name="DBR + MLA substrate / DBR pair 4 side"/>
-          <p:cNvSpPr/>
-          <p:nvPr/>
-        </p:nvSpPr>
-        <p:spPr>
-          <a:xfrm>
-            <a:off x="9492105" y="2164657"/>
-            <a:ext cx="278668" cy="232948"/>
-          </a:xfrm>
-          <a:custGeom>
-            <a:avLst/>
-            <a:gdLst/>
-            <a:ahLst/>
-            <a:cxnLst/>
-            <a:rect l="l" t="t" r="r" b="b"/>
-            <a:pathLst>
-              <a:path w="278668" h="232948">
-                <a:moveTo>
-                  <a:pt x="0" y="232948"/>
-                </a:moveTo>
-                <a:lnTo>
-                  <a:pt x="278668" y="58781"/>
-                </a:lnTo>
-                <a:lnTo>
-                  <a:pt x="278668" y="0"/>
-                </a:lnTo>
-                <a:lnTo>
-                  <a:pt x="0" y="174167"/>
-                </a:lnTo>
-                <a:close/>
-              </a:path>
-            </a:pathLst>
-          </a:custGeom>
-          <a:solidFill>
-            <a:srgbClr val="222528"/>
-          </a:solidFill>
-          <a:ln w="9525">
-            <a:solidFill>
-              <a:srgbClr val="5D666F"/>
-            </a:solidFill>
-          </a:ln>
-          <a:effectLst/>
-        </p:spPr>
-        <p:style>
-          <a:lnRef idx="1">
-            <a:schemeClr val="accent1"/>
-          </a:lnRef>
-          <a:fillRef idx="3">
-            <a:schemeClr val="accent1"/>
-          </a:fillRef>
-          <a:effectRef idx="2">
-            <a:schemeClr val="accent1"/>
-          </a:effectRef>
-          <a:fontRef idx="minor">
-            <a:schemeClr val="lt1"/>
-          </a:fontRef>
-        </p:style>
-        <p:txBody>
-          <a:bodyPr rtlCol="0" anchor="ctr"/>
-          <a:lstStyle/>
-          <a:p>
-            <a:pPr algn="ctr"/>
-          </a:p>
-        </p:txBody>
-      </p:sp>
-      <p:sp>
-        <p:nvSpPr>
-          <p:cNvPr id="78" name="DBR + MLA substrate / DBR pair 4 top"/>
-          <p:cNvSpPr/>
-          <p:nvPr/>
-        </p:nvSpPr>
-        <p:spPr>
-          <a:xfrm>
-            <a:off x="6879599" y="2164657"/>
-            <a:ext cx="2891174" cy="174167"/>
-          </a:xfrm>
-          <a:custGeom>
-            <a:avLst/>
-            <a:gdLst/>
-            <a:ahLst/>
-            <a:cxnLst/>
-            <a:rect l="l" t="t" r="r" b="b"/>
-            <a:pathLst>
-              <a:path w="2891174" h="174167">
-                <a:moveTo>
-                  <a:pt x="0" y="174167"/>
-                </a:moveTo>
-                <a:lnTo>
-                  <a:pt x="2612506" y="174167"/>
-                </a:lnTo>
-                <a:lnTo>
-                  <a:pt x="2891174" y="0"/>
-                </a:lnTo>
-                <a:lnTo>
-                  <a:pt x="278668" y="0"/>
-                </a:lnTo>
-                <a:close/>
-              </a:path>
-            </a:pathLst>
-          </a:custGeom>
-          <a:solidFill>
-            <a:srgbClr val="2F3438"/>
-          </a:solidFill>
-          <a:ln w="9525">
-            <a:solidFill>
-              <a:srgbClr val="5D666F"/>
-            </a:solidFill>
-          </a:ln>
-          <a:effectLst/>
-        </p:spPr>
-        <p:style>
-          <a:lnRef idx="1">
-            <a:schemeClr val="accent1"/>
-          </a:lnRef>
-          <a:fillRef idx="3">
-            <a:schemeClr val="accent1"/>
-          </a:fillRef>
-          <a:effectRef idx="2">
-            <a:schemeClr val="accent1"/>
-          </a:effectRef>
-          <a:fontRef idx="minor">
-            <a:schemeClr val="lt1"/>
-          </a:fontRef>
-        </p:style>
-        <p:txBody>
-          <a:bodyPr rtlCol="0" anchor="ctr"/>
-          <a:lstStyle/>
-          <a:p>
-            <a:pPr algn="ctr"/>
-          </a:p>
-        </p:txBody>
-      </p:sp>
-      <p:sp>
-        <p:nvSpPr>
-          <p:cNvPr id="79" name="DBR + MLA substrate / DBR label"/>
+          <p:cNvPr id="105" name="DBR + MLA substrate / DBR label"/>
           <p:cNvSpPr txBox="1"/>
           <p:nvPr/>
         </p:nvSpPr>
@@ -8574,13 +10316,13 @@
       </p:sp>
       <p:sp>
         <p:nvSpPr>
-          <p:cNvPr id="80" name="DBR + MLA substrate title"/>
+          <p:cNvPr id="106" name="DBR + MLA substrate title"/>
           <p:cNvSpPr txBox="1"/>
           <p:nvPr/>
         </p:nvSpPr>
         <p:spPr>
           <a:xfrm>
-            <a:off x="6061014" y="669432"/>
+            <a:off x="5921680" y="669432"/>
             <a:ext cx="4528344" cy="430193"/>
           </a:xfrm>
           <a:prstGeom prst="rect">
@@ -8609,7 +10351,7 @@
       </p:sp>
       <p:cxnSp>
         <p:nvCxnSpPr>
-          <p:cNvPr id="81" name="bottom emission"/>
+          <p:cNvPr id="107" name="bottom emission"/>
           <p:cNvCxnSpPr/>
           <p:nvPr/>
         </p:nvCxnSpPr>
@@ -8646,7 +10388,7 @@
       </p:cxnSp>
       <p:cxnSp>
         <p:nvCxnSpPr>
-          <p:cNvPr id="82" name="bottom emission"/>
+          <p:cNvPr id="108" name="bottom emission"/>
           <p:cNvCxnSpPr/>
           <p:nvPr/>
         </p:nvCxnSpPr>
@@ -8683,7 +10425,7 @@
       </p:cxnSp>
       <p:cxnSp>
         <p:nvCxnSpPr>
-          <p:cNvPr id="83" name="bottom emission"/>
+          <p:cNvPr id="109" name="bottom emission"/>
           <p:cNvCxnSpPr/>
           <p:nvPr/>
         </p:nvCxnSpPr>
@@ -8720,7 +10462,7 @@
       </p:cxnSp>
       <p:sp>
         <p:nvSpPr>
-          <p:cNvPr id="84" name="emission label"/>
+          <p:cNvPr id="110" name="emission label"/>
           <p:cNvSpPr txBox="1"/>
           <p:nvPr/>
         </p:nvSpPr>
